--- a/1. 일정/1. Weekly Plan/보고자료/프로젝트/연구소_주간업무_오세영_250709.pptx
+++ b/1. 일정/1. Weekly Plan/보고자료/프로젝트/연구소_주간업무_오세영_250709.pptx
@@ -6893,7 +6893,7 @@
     <mc:Choice Requires="p14">
       <p:transition/>
     </mc:Choice>
-    <mc:Fallback xmlns:dsp="http://schemas.microsoft.com/office/drawing/2008/diagram" xmlns:dgm="http://schemas.openxmlformats.org/drawingml/2006/diagram" xmlns:c="http://schemas.openxmlformats.org/drawingml/2006/chart" xmlns="">
+    <mc:Fallback xmlns="" xmlns:c="http://schemas.openxmlformats.org/drawingml/2006/chart" xmlns:dgm="http://schemas.openxmlformats.org/drawingml/2006/diagram" xmlns:dsp="http://schemas.microsoft.com/office/drawing/2008/diagram">
       <p:transition/>
     </mc:Fallback>
   </mc:AlternateContent>
@@ -6933,7 +6933,7 @@
           <p:nvPr>
             <p:extLst>
               <p:ext uri="{D42A27DB-BD31-4B8C-83A1-F6EECF244321}">
-                <p14:modId xmlns:p14="http://schemas.microsoft.com/office/powerpoint/2010/main" val="3903568036"/>
+                <p14:modId xmlns:p14="http://schemas.microsoft.com/office/powerpoint/2010/main" val="3227431546"/>
               </p:ext>
             </p:extLst>
           </p:nvPr>
@@ -7631,7 +7631,7 @@
                         <a:defRPr/>
                       </a:pPr>
                       <a:r>
-                        <a:rPr kumimoji="1" lang="en-US" altLang="ko-KR" sz="1000" b="1" i="0" u="none" strike="noStrike" kern="1200" cap="none" normalizeH="0" baseline="0" dirty="0" smtClean="0">
+                        <a:rPr kumimoji="1" lang="en-US" altLang="ko-KR" sz="1000" b="0" i="0" u="none" strike="noStrike" kern="1200" cap="none" normalizeH="0" baseline="0" smtClean="0">
                           <a:ln>
                             <a:noFill/>
                           </a:ln>
@@ -7643,25 +7643,10 @@
                           <a:ea typeface="+mn-ea"/>
                           <a:cs typeface="+mn-cs"/>
                         </a:rPr>
-                        <a:t>1</a:t>
+                        <a:t>1. Kick-Off </a:t>
                       </a:r>
                       <a:r>
-                        <a:rPr kumimoji="1" lang="en-US" altLang="ko-KR" sz="1000" b="1" i="0" u="none" strike="noStrike" kern="1200" cap="none" normalizeH="0" baseline="0" smtClean="0">
-                          <a:ln>
-                            <a:noFill/>
-                          </a:ln>
-                          <a:solidFill>
-                            <a:srgbClr val="0000FF"/>
-                          </a:solidFill>
-                          <a:effectLst/>
-                          <a:latin typeface="+mn-lt"/>
-                          <a:ea typeface="+mn-ea"/>
-                          <a:cs typeface="+mn-cs"/>
-                        </a:rPr>
-                        <a:t>. Kick-Off </a:t>
-                      </a:r>
-                      <a:r>
-                        <a:rPr kumimoji="1" lang="ko-KR" altLang="en-US" sz="1000" b="1" i="0" u="none" strike="noStrike" kern="1200" cap="none" normalizeH="0" baseline="0" smtClean="0">
+                        <a:rPr kumimoji="1" lang="ko-KR" altLang="en-US" sz="1000" b="0" i="0" u="none" strike="noStrike" kern="1200" cap="none" normalizeH="0" baseline="0" smtClean="0">
                           <a:ln>
                             <a:noFill/>
                           </a:ln>
@@ -7676,7 +7661,7 @@
                         <a:t>회의 진행 </a:t>
                       </a:r>
                       <a:r>
-                        <a:rPr kumimoji="1" lang="en-US" altLang="ko-KR" sz="1000" b="1" i="0" u="none" strike="noStrike" kern="1200" cap="none" normalizeH="0" baseline="0" smtClean="0">
+                        <a:rPr kumimoji="1" lang="en-US" altLang="ko-KR" sz="1000" b="0" i="0" u="none" strike="noStrike" kern="1200" cap="none" normalizeH="0" baseline="0" smtClean="0">
                           <a:ln>
                             <a:noFill/>
                           </a:ln>
@@ -7691,7 +7676,7 @@
                         <a:t>: 7</a:t>
                       </a:r>
                       <a:r>
-                        <a:rPr kumimoji="1" lang="ko-KR" altLang="en-US" sz="1000" b="1" i="0" u="none" strike="noStrike" kern="1200" cap="none" normalizeH="0" baseline="0" smtClean="0">
+                        <a:rPr kumimoji="1" lang="ko-KR" altLang="en-US" sz="1000" b="0" i="0" u="none" strike="noStrike" kern="1200" cap="none" normalizeH="0" baseline="0" smtClean="0">
                           <a:ln>
                             <a:noFill/>
                           </a:ln>
@@ -7705,7 +7690,7 @@
                         </a:rPr>
                         <a:t>월 중</a:t>
                       </a:r>
-                      <a:endParaRPr kumimoji="1" lang="en-US" altLang="ko-KR" sz="1000" b="1" i="0" u="none" strike="noStrike" kern="1200" cap="none" normalizeH="0" baseline="0" dirty="0">
+                      <a:endParaRPr kumimoji="1" lang="en-US" altLang="ko-KR" sz="1000" b="0" i="0" u="none" strike="noStrike" kern="1200" cap="none" normalizeH="0" baseline="0" dirty="0">
                         <a:ln>
                           <a:noFill/>
                         </a:ln>
@@ -10239,7 +10224,7 @@
           <p:nvPr>
             <p:extLst>
               <p:ext uri="{D42A27DB-BD31-4B8C-83A1-F6EECF244321}">
-                <p14:modId xmlns:p14="http://schemas.microsoft.com/office/powerpoint/2010/main" val="3620080852"/>
+                <p14:modId xmlns:p14="http://schemas.microsoft.com/office/powerpoint/2010/main" val="2423497019"/>
               </p:ext>
             </p:extLst>
           </p:nvPr>
@@ -11013,7 +10998,7 @@
                         <a:t>- </a:t>
                       </a:r>
                       <a:r>
-                        <a:rPr kumimoji="0" lang="en-US" altLang="ko-KR" sz="1050" b="0" i="0" u="none" strike="noStrike" kern="1200" cap="none" spc="0" normalizeH="0" baseline="0" noProof="0" smtClean="0">
+                        <a:rPr kumimoji="0" lang="en-US" altLang="ko-KR" sz="1000" b="0" i="0" u="none" strike="noStrike" kern="1200" cap="none" spc="0" normalizeH="0" baseline="0" noProof="0" smtClean="0">
                           <a:ln>
                             <a:noFill/>
                           </a:ln>
@@ -11030,7 +11015,7 @@
                         <a:t>1</a:t>
                       </a:r>
                       <a:r>
-                        <a:rPr kumimoji="0" lang="ko-KR" altLang="en-US" sz="1050" b="0" i="0" u="none" strike="noStrike" kern="1200" cap="none" spc="0" normalizeH="0" baseline="0" noProof="0" smtClean="0">
+                        <a:rPr kumimoji="0" lang="ko-KR" altLang="en-US" sz="1000" b="0" i="0" u="none" strike="noStrike" kern="1200" cap="none" spc="0" normalizeH="0" baseline="0" noProof="0" smtClean="0">
                           <a:ln>
                             <a:noFill/>
                           </a:ln>
@@ -11047,7 +11032,7 @@
                         <a:t>안</a:t>
                       </a:r>
                       <a:r>
-                        <a:rPr kumimoji="0" lang="en-US" altLang="ko-KR" sz="1050" b="0" i="0" u="none" strike="noStrike" kern="1200" cap="none" spc="0" normalizeH="0" baseline="0" noProof="0" smtClean="0">
+                        <a:rPr kumimoji="0" lang="en-US" altLang="ko-KR" sz="1000" b="0" i="0" u="none" strike="noStrike" kern="1200" cap="none" spc="0" normalizeH="0" baseline="0" noProof="0" smtClean="0">
                           <a:ln>
                             <a:noFill/>
                           </a:ln>
@@ -11064,7 +11049,7 @@
                         <a:t>) S/W </a:t>
                       </a:r>
                       <a:r>
-                        <a:rPr kumimoji="0" lang="ko-KR" altLang="en-US" sz="1050" b="0" i="0" u="none" strike="noStrike" kern="1200" cap="none" spc="0" normalizeH="0" baseline="0" noProof="0" smtClean="0">
+                        <a:rPr kumimoji="0" lang="ko-KR" altLang="en-US" sz="1000" b="0" i="0" u="none" strike="noStrike" kern="1200" cap="none" spc="0" normalizeH="0" baseline="0" noProof="0" smtClean="0">
                           <a:ln>
                             <a:noFill/>
                           </a:ln>
@@ -11080,7 +11065,7 @@
                         </a:rPr>
                         <a:t>전력제어를 통한 좌우 온도 편차 개선</a:t>
                       </a:r>
-                      <a:endParaRPr kumimoji="0" lang="en-US" altLang="ko-KR" sz="1050" b="0" i="0" u="none" strike="noStrike" kern="1200" cap="none" spc="0" normalizeH="0" baseline="0" noProof="0" smtClean="0">
+                      <a:endParaRPr kumimoji="0" lang="en-US" altLang="ko-KR" sz="1000" b="0" i="0" u="none" strike="noStrike" kern="1200" cap="none" spc="0" normalizeH="0" baseline="0" noProof="0" smtClean="0">
                         <a:ln>
                           <a:noFill/>
                         </a:ln>
@@ -11112,7 +11097,7 @@
                         <a:defRPr/>
                       </a:pPr>
                       <a:r>
-                        <a:rPr kumimoji="0" lang="en-US" altLang="ko-KR" sz="1050" b="0" i="0" u="none" strike="noStrike" kern="1200" cap="none" spc="0" normalizeH="0" baseline="0" noProof="0" smtClean="0">
+                        <a:rPr kumimoji="0" lang="en-US" altLang="ko-KR" sz="1000" b="0" i="0" u="none" strike="noStrike" kern="1200" cap="none" spc="0" normalizeH="0" baseline="0" noProof="0" smtClean="0">
                           <a:ln>
                             <a:noFill/>
                           </a:ln>
@@ -11129,7 +11114,7 @@
                         <a:t>   : </a:t>
                       </a:r>
                       <a:r>
-                        <a:rPr kumimoji="0" lang="ko-KR" altLang="en-US" sz="1050" b="0" i="0" u="none" strike="noStrike" kern="1200" cap="none" spc="0" normalizeH="0" baseline="0" noProof="0" smtClean="0">
+                        <a:rPr kumimoji="0" lang="ko-KR" altLang="en-US" sz="1000" b="0" i="0" u="none" strike="noStrike" kern="1200" cap="none" spc="0" normalizeH="0" baseline="0" noProof="0" smtClean="0">
                           <a:ln>
                             <a:noFill/>
                           </a:ln>
@@ -11146,7 +11131,7 @@
                         <a:t>합동 평가 진행 </a:t>
                       </a:r>
                       <a:r>
-                        <a:rPr kumimoji="0" lang="en-US" altLang="ko-KR" sz="1050" b="0" i="0" u="none" strike="noStrike" kern="1200" cap="none" spc="0" normalizeH="0" baseline="0" noProof="0" smtClean="0">
+                        <a:rPr kumimoji="0" lang="en-US" altLang="ko-KR" sz="1000" b="0" i="0" u="none" strike="noStrike" kern="1200" cap="none" spc="0" normalizeH="0" baseline="0" noProof="0" smtClean="0">
                           <a:ln>
                             <a:noFill/>
                           </a:ln>
@@ -11180,7 +11165,7 @@
                         <a:defRPr/>
                       </a:pPr>
                       <a:r>
-                        <a:rPr kumimoji="0" lang="en-US" altLang="ko-KR" sz="1050" b="0" i="0" u="none" strike="noStrike" kern="1200" cap="none" spc="0" normalizeH="0" baseline="0" noProof="0" smtClean="0">
+                        <a:rPr kumimoji="0" lang="en-US" altLang="ko-KR" sz="1000" b="0" i="0" u="none" strike="noStrike" kern="1200" cap="none" spc="0" normalizeH="0" baseline="0" noProof="0" smtClean="0">
                           <a:ln>
                             <a:noFill/>
                           </a:ln>
@@ -11194,27 +11179,10 @@
                           <a:ea typeface="현대하모니 L" panose="02020603020101020101" pitchFamily="18" charset="-127"/>
                           <a:cs typeface="+mn-cs"/>
                         </a:rPr>
-                        <a:t>- </a:t>
+                        <a:t>- 2</a:t>
                       </a:r>
                       <a:r>
-                        <a:rPr kumimoji="0" lang="en-US" altLang="ko-KR" sz="1050" b="0" i="0" u="none" strike="noStrike" kern="1200" cap="none" spc="0" normalizeH="0" baseline="0" noProof="0" smtClean="0">
-                          <a:ln>
-                            <a:noFill/>
-                          </a:ln>
-                          <a:solidFill>
-                            <a:srgbClr val="0000FF"/>
-                          </a:solidFill>
-                          <a:effectLst/>
-                          <a:uLnTx/>
-                          <a:uFillTx/>
-                          <a:latin typeface="현대하모니 L" panose="02020603020101020101" pitchFamily="18" charset="-127"/>
-                          <a:ea typeface="현대하모니 L" panose="02020603020101020101" pitchFamily="18" charset="-127"/>
-                          <a:cs typeface="+mn-cs"/>
-                        </a:rPr>
-                        <a:t>2</a:t>
-                      </a:r>
-                      <a:r>
-                        <a:rPr kumimoji="0" lang="ko-KR" altLang="en-US" sz="1050" b="0" i="0" u="none" strike="noStrike" kern="1200" cap="none" spc="0" normalizeH="0" baseline="0" noProof="0" smtClean="0">
+                        <a:rPr kumimoji="0" lang="ko-KR" altLang="en-US" sz="1000" b="0" i="0" u="none" strike="noStrike" kern="1200" cap="none" spc="0" normalizeH="0" baseline="0" noProof="0" smtClean="0">
                           <a:ln>
                             <a:noFill/>
                           </a:ln>
@@ -11231,7 +11199,7 @@
                         <a:t>안</a:t>
                       </a:r>
                       <a:r>
-                        <a:rPr kumimoji="0" lang="en-US" altLang="ko-KR" sz="1050" b="0" i="0" u="none" strike="noStrike" kern="1200" cap="none" spc="0" normalizeH="0" baseline="0" noProof="0" smtClean="0">
+                        <a:rPr kumimoji="0" lang="en-US" altLang="ko-KR" sz="1000" b="0" i="0" u="none" strike="noStrike" kern="1200" cap="none" spc="0" normalizeH="0" baseline="0" noProof="0" smtClean="0">
                           <a:ln>
                             <a:noFill/>
                           </a:ln>
@@ -11248,7 +11216,7 @@
                         <a:t>) PTC STONE </a:t>
                       </a:r>
                       <a:r>
-                        <a:rPr kumimoji="0" lang="ko-KR" altLang="en-US" sz="1050" b="0" i="0" u="none" strike="noStrike" kern="1200" cap="none" spc="0" normalizeH="0" baseline="0" noProof="0" smtClean="0">
+                        <a:rPr kumimoji="0" lang="ko-KR" altLang="en-US" sz="1000" b="0" i="0" u="none" strike="noStrike" kern="1200" cap="none" spc="0" normalizeH="0" baseline="0" noProof="0" smtClean="0">
                           <a:ln>
                             <a:noFill/>
                           </a:ln>
@@ -11265,7 +11233,7 @@
                         <a:t>배치 및 </a:t>
                       </a:r>
                       <a:r>
-                        <a:rPr kumimoji="0" lang="en-US" altLang="ko-KR" sz="1050" b="0" i="0" u="none" strike="noStrike" kern="1200" cap="none" spc="0" normalizeH="0" baseline="0" noProof="0" smtClean="0">
+                        <a:rPr kumimoji="0" lang="en-US" altLang="ko-KR" sz="1000" b="0" i="0" u="none" strike="noStrike" kern="1200" cap="none" spc="0" normalizeH="0" baseline="0" noProof="0" smtClean="0">
                           <a:ln>
                             <a:noFill/>
                           </a:ln>
@@ -11282,7 +11250,7 @@
                         <a:t>S/W</a:t>
                       </a:r>
                       <a:r>
-                        <a:rPr kumimoji="0" lang="ko-KR" altLang="en-US" sz="1050" b="0" i="0" u="none" strike="noStrike" kern="1200" cap="none" spc="0" normalizeH="0" baseline="0" noProof="0" smtClean="0">
+                        <a:rPr kumimoji="0" lang="ko-KR" altLang="en-US" sz="1000" b="0" i="0" u="none" strike="noStrike" kern="1200" cap="none" spc="0" normalizeH="0" baseline="0" noProof="0" smtClean="0">
                           <a:ln>
                             <a:noFill/>
                           </a:ln>
@@ -11298,7 +11266,7 @@
                         </a:rPr>
                         <a:t>전력 제어를 통한 좌우 온도 편차 개</a:t>
                       </a:r>
-                      <a:endParaRPr kumimoji="0" lang="en-US" altLang="ko-KR" sz="1050" b="0" i="0" u="none" strike="noStrike" kern="1200" cap="none" spc="0" normalizeH="0" baseline="0" noProof="0" smtClean="0">
+                      <a:endParaRPr kumimoji="0" lang="en-US" altLang="ko-KR" sz="1000" b="0" i="0" u="none" strike="noStrike" kern="1200" cap="none" spc="0" normalizeH="0" baseline="0" noProof="0" smtClean="0">
                         <a:ln>
                           <a:noFill/>
                         </a:ln>
@@ -11330,7 +11298,7 @@
                         <a:defRPr/>
                       </a:pPr>
                       <a:r>
-                        <a:rPr kumimoji="0" lang="en-US" altLang="ko-KR" sz="1050" b="0" i="0" u="none" strike="noStrike" kern="1200" cap="none" spc="0" normalizeH="0" baseline="0" noProof="0" smtClean="0">
+                        <a:rPr kumimoji="0" lang="en-US" altLang="ko-KR" sz="1000" b="0" i="0" u="none" strike="noStrike" kern="1200" cap="none" spc="0" normalizeH="0" baseline="0" noProof="0" smtClean="0">
                           <a:ln>
                             <a:noFill/>
                           </a:ln>
@@ -11347,7 +11315,7 @@
                         <a:t>   </a:t>
                       </a:r>
                       <a:r>
-                        <a:rPr kumimoji="0" lang="ko-KR" altLang="en-US" sz="1050" b="0" i="0" u="none" strike="noStrike" kern="1200" cap="none" spc="0" normalizeH="0" baseline="0" noProof="0" smtClean="0">
+                        <a:rPr kumimoji="0" lang="ko-KR" altLang="en-US" sz="1000" b="0" i="0" u="none" strike="noStrike" kern="1200" cap="none" spc="0" normalizeH="0" baseline="0" noProof="0" smtClean="0">
                           <a:ln>
                             <a:noFill/>
                           </a:ln>
@@ -11363,7 +11331,7 @@
                         </a:rPr>
                         <a:t>선</a:t>
                       </a:r>
-                      <a:endParaRPr kumimoji="0" lang="en-US" altLang="ko-KR" sz="1050" b="0" i="0" u="none" strike="noStrike" kern="1200" cap="none" spc="0" normalizeH="0" baseline="0" noProof="0" smtClean="0">
+                      <a:endParaRPr kumimoji="0" lang="en-US" altLang="ko-KR" sz="1000" b="0" i="0" u="none" strike="noStrike" kern="1200" cap="none" spc="0" normalizeH="0" baseline="0" noProof="0" smtClean="0">
                         <a:ln>
                           <a:noFill/>
                         </a:ln>
@@ -11395,7 +11363,7 @@
                         <a:defRPr/>
                       </a:pPr>
                       <a:r>
-                        <a:rPr kumimoji="0" lang="en-US" altLang="ko-KR" sz="1050" b="0" i="0" u="none" strike="noStrike" kern="1200" cap="none" spc="0" normalizeH="0" baseline="0" noProof="0" smtClean="0">
+                        <a:rPr kumimoji="0" lang="en-US" altLang="ko-KR" sz="1000" b="0" i="0" u="none" strike="noStrike" kern="1200" cap="none" spc="0" normalizeH="0" baseline="0" noProof="0" smtClean="0">
                           <a:ln>
                             <a:noFill/>
                           </a:ln>
@@ -11410,10 +11378,10 @@
                           <a:cs typeface="+mn-cs"/>
                           <a:sym typeface="Wingdings" panose="05000000000000000000" pitchFamily="2" charset="2"/>
                         </a:rPr>
-                        <a:t>   : </a:t>
+                        <a:t>   </a:t>
                       </a:r>
                       <a:r>
-                        <a:rPr kumimoji="0" lang="ko-KR" altLang="en-US" sz="1050" b="0" i="0" u="none" strike="noStrike" kern="1200" cap="none" spc="0" normalizeH="0" baseline="0" noProof="0" smtClean="0">
+                        <a:rPr kumimoji="0" lang="en-US" altLang="ko-KR" sz="1000" b="0" i="0" u="none" strike="noStrike" kern="1200" cap="none" spc="0" normalizeH="0" baseline="0" noProof="0" smtClean="0">
                           <a:ln>
                             <a:noFill/>
                           </a:ln>
@@ -11428,9 +11396,45 @@
                           <a:cs typeface="+mn-cs"/>
                           <a:sym typeface="Wingdings" panose="05000000000000000000" pitchFamily="2" charset="2"/>
                         </a:rPr>
-                        <a:t>좌우 온도 편차 발생의 근본 적인 원인 시험 및 결과 회신 요청</a:t>
+                        <a:t>: </a:t>
                       </a:r>
-                      <a:endParaRPr kumimoji="0" lang="en-US" altLang="ko-KR" sz="1050" b="0" i="0" u="none" strike="noStrike" kern="1200" cap="none" spc="0" normalizeH="0" baseline="0" noProof="0" smtClean="0">
+                      <a:r>
+                        <a:rPr kumimoji="0" lang="ko-KR" altLang="en-US" sz="1000" b="0" i="0" u="none" strike="noStrike" kern="1200" cap="none" spc="0" normalizeH="0" baseline="0" noProof="0" smtClean="0">
+                          <a:ln>
+                            <a:noFill/>
+                          </a:ln>
+                          <a:solidFill>
+                            <a:srgbClr val="0000FF"/>
+                          </a:solidFill>
+                          <a:effectLst/>
+                          <a:uLnTx/>
+                          <a:uFillTx/>
+                          <a:latin typeface="현대하모니 L" panose="02020603020101020101" pitchFamily="18" charset="-127"/>
+                          <a:ea typeface="현대하모니 L" panose="02020603020101020101" pitchFamily="18" charset="-127"/>
+                          <a:cs typeface="+mn-cs"/>
+                          <a:sym typeface="Wingdings" panose="05000000000000000000" pitchFamily="2" charset="2"/>
+                        </a:rPr>
+                        <a:t>좌우 온도 편차 발생의 근본 적인 원인 </a:t>
+                      </a:r>
+                      <a:r>
+                        <a:rPr kumimoji="0" lang="ko-KR" altLang="en-US" sz="1000" b="0" i="0" u="none" strike="noStrike" kern="1200" cap="none" spc="0" normalizeH="0" baseline="0" noProof="0" smtClean="0">
+                          <a:ln>
+                            <a:noFill/>
+                          </a:ln>
+                          <a:solidFill>
+                            <a:srgbClr val="0000FF"/>
+                          </a:solidFill>
+                          <a:effectLst/>
+                          <a:uLnTx/>
+                          <a:uFillTx/>
+                          <a:latin typeface="현대하모니 L" panose="02020603020101020101" pitchFamily="18" charset="-127"/>
+                          <a:ea typeface="현대하모니 L" panose="02020603020101020101" pitchFamily="18" charset="-127"/>
+                          <a:cs typeface="+mn-cs"/>
+                          <a:sym typeface="Wingdings" panose="05000000000000000000" pitchFamily="2" charset="2"/>
+                        </a:rPr>
+                        <a:t>시험</a:t>
+                      </a:r>
+                      <a:endParaRPr kumimoji="0" lang="en-US" altLang="ko-KR" sz="1000" b="0" i="0" u="none" strike="noStrike" kern="1200" cap="none" spc="0" normalizeH="0" baseline="0" noProof="0" smtClean="0">
                         <a:ln>
                           <a:noFill/>
                         </a:ln>
@@ -11463,7 +11467,7 @@
                         <a:defRPr/>
                       </a:pPr>
                       <a:r>
-                        <a:rPr kumimoji="0" lang="en-US" altLang="ko-KR" sz="1050" b="0" i="0" u="none" strike="noStrike" kern="1200" cap="none" spc="0" normalizeH="0" baseline="0" noProof="0" smtClean="0">
+                        <a:rPr kumimoji="0" lang="en-US" altLang="ko-KR" sz="1000" b="0" i="0" u="none" strike="noStrike" kern="1200" cap="none" spc="0" normalizeH="0" baseline="0" noProof="0" smtClean="0">
                           <a:ln>
                             <a:noFill/>
                           </a:ln>
@@ -11478,10 +11482,10 @@
                           <a:cs typeface="+mn-cs"/>
                           <a:sym typeface="Wingdings" panose="05000000000000000000" pitchFamily="2" charset="2"/>
                         </a:rPr>
-                        <a:t>     </a:t>
+                        <a:t>      </a:t>
                       </a:r>
                       <a:r>
-                        <a:rPr kumimoji="0" lang="ko-KR" altLang="en-US" sz="1050" b="0" i="0" u="none" strike="noStrike" kern="1200" cap="none" spc="0" normalizeH="0" baseline="0" noProof="0" smtClean="0">
+                        <a:rPr kumimoji="0" lang="ko-KR" altLang="en-US" sz="1000" b="0" i="0" u="none" strike="noStrike" kern="1200" cap="none" spc="0" normalizeH="0" baseline="0" noProof="0" smtClean="0">
                           <a:ln>
                             <a:noFill/>
                           </a:ln>
@@ -11496,153 +11500,9 @@
                           <a:cs typeface="+mn-cs"/>
                           <a:sym typeface="Wingdings" panose="05000000000000000000" pitchFamily="2" charset="2"/>
                         </a:rPr>
-                        <a:t>일정 상 </a:t>
+                        <a:t>제어부에 따른 온도 편차 미발생</a:t>
                       </a:r>
-                      <a:r>
-                        <a:rPr kumimoji="0" lang="en-US" altLang="ko-KR" sz="1050" b="0" i="0" u="none" strike="noStrike" kern="1200" cap="none" spc="0" normalizeH="0" baseline="0" noProof="0" smtClean="0">
-                          <a:ln>
-                            <a:noFill/>
-                          </a:ln>
-                          <a:solidFill>
-                            <a:srgbClr val="0000FF"/>
-                          </a:solidFill>
-                          <a:effectLst/>
-                          <a:uLnTx/>
-                          <a:uFillTx/>
-                          <a:latin typeface="현대하모니 L" panose="02020603020101020101" pitchFamily="18" charset="-127"/>
-                          <a:ea typeface="현대하모니 L" panose="02020603020101020101" pitchFamily="18" charset="-127"/>
-                          <a:cs typeface="+mn-cs"/>
-                          <a:sym typeface="Wingdings" panose="05000000000000000000" pitchFamily="2" charset="2"/>
-                        </a:rPr>
-                        <a:t>QV</a:t>
-                      </a:r>
-                      <a:r>
-                        <a:rPr kumimoji="0" lang="ko-KR" altLang="en-US" sz="1050" b="0" i="0" u="none" strike="noStrike" kern="1200" cap="none" spc="0" normalizeH="0" baseline="0" noProof="0" smtClean="0">
-                          <a:ln>
-                            <a:noFill/>
-                          </a:ln>
-                          <a:solidFill>
-                            <a:srgbClr val="0000FF"/>
-                          </a:solidFill>
-                          <a:effectLst/>
-                          <a:uLnTx/>
-                          <a:uFillTx/>
-                          <a:latin typeface="현대하모니 L" panose="02020603020101020101" pitchFamily="18" charset="-127"/>
-                          <a:ea typeface="현대하모니 L" panose="02020603020101020101" pitchFamily="18" charset="-127"/>
-                          <a:cs typeface="+mn-cs"/>
-                          <a:sym typeface="Wingdings" panose="05000000000000000000" pitchFamily="2" charset="2"/>
-                        </a:rPr>
-                        <a:t>에서 </a:t>
-                      </a:r>
-                      <a:r>
-                        <a:rPr kumimoji="0" lang="en-US" altLang="ko-KR" sz="1050" b="0" i="0" u="none" strike="noStrike" kern="1200" cap="none" spc="0" normalizeH="0" baseline="0" noProof="0" smtClean="0">
-                          <a:ln>
-                            <a:noFill/>
-                          </a:ln>
-                          <a:solidFill>
-                            <a:srgbClr val="0000FF"/>
-                          </a:solidFill>
-                          <a:effectLst/>
-                          <a:uLnTx/>
-                          <a:uFillTx/>
-                          <a:latin typeface="현대하모니 L" panose="02020603020101020101" pitchFamily="18" charset="-127"/>
-                          <a:ea typeface="현대하모니 L" panose="02020603020101020101" pitchFamily="18" charset="-127"/>
-                          <a:cs typeface="+mn-cs"/>
-                          <a:sym typeface="Wingdings" panose="05000000000000000000" pitchFamily="2" charset="2"/>
-                        </a:rPr>
-                        <a:t>1</a:t>
-                      </a:r>
-                      <a:r>
-                        <a:rPr kumimoji="0" lang="ko-KR" altLang="en-US" sz="1050" b="0" i="0" u="none" strike="noStrike" kern="1200" cap="none" spc="0" normalizeH="0" baseline="0" noProof="0" smtClean="0">
-                          <a:ln>
-                            <a:noFill/>
-                          </a:ln>
-                          <a:solidFill>
-                            <a:srgbClr val="0000FF"/>
-                          </a:solidFill>
-                          <a:effectLst/>
-                          <a:uLnTx/>
-                          <a:uFillTx/>
-                          <a:latin typeface="현대하모니 L" panose="02020603020101020101" pitchFamily="18" charset="-127"/>
-                          <a:ea typeface="현대하모니 L" panose="02020603020101020101" pitchFamily="18" charset="-127"/>
-                          <a:cs typeface="+mn-cs"/>
-                          <a:sym typeface="Wingdings" panose="05000000000000000000" pitchFamily="2" charset="2"/>
-                        </a:rPr>
-                        <a:t>안</a:t>
-                      </a:r>
-                      <a:r>
-                        <a:rPr kumimoji="0" lang="en-US" altLang="ko-KR" sz="1050" b="0" i="0" u="none" strike="noStrike" kern="1200" cap="none" spc="0" normalizeH="0" baseline="0" noProof="0" smtClean="0">
-                          <a:ln>
-                            <a:noFill/>
-                          </a:ln>
-                          <a:solidFill>
-                            <a:srgbClr val="0000FF"/>
-                          </a:solidFill>
-                          <a:effectLst/>
-                          <a:uLnTx/>
-                          <a:uFillTx/>
-                          <a:latin typeface="현대하모니 L" panose="02020603020101020101" pitchFamily="18" charset="-127"/>
-                          <a:ea typeface="현대하모니 L" panose="02020603020101020101" pitchFamily="18" charset="-127"/>
-                          <a:cs typeface="+mn-cs"/>
-                          <a:sym typeface="Wingdings" panose="05000000000000000000" pitchFamily="2" charset="2"/>
-                        </a:rPr>
-                        <a:t>)</a:t>
-                      </a:r>
-                      <a:r>
-                        <a:rPr kumimoji="0" lang="ko-KR" altLang="en-US" sz="1050" b="0" i="0" u="none" strike="noStrike" kern="1200" cap="none" spc="0" normalizeH="0" baseline="0" noProof="0" smtClean="0">
-                          <a:ln>
-                            <a:noFill/>
-                          </a:ln>
-                          <a:solidFill>
-                            <a:srgbClr val="0000FF"/>
-                          </a:solidFill>
-                          <a:effectLst/>
-                          <a:uLnTx/>
-                          <a:uFillTx/>
-                          <a:latin typeface="현대하모니 L" panose="02020603020101020101" pitchFamily="18" charset="-127"/>
-                          <a:ea typeface="현대하모니 L" panose="02020603020101020101" pitchFamily="18" charset="-127"/>
-                          <a:cs typeface="+mn-cs"/>
-                          <a:sym typeface="Wingdings" panose="05000000000000000000" pitchFamily="2" charset="2"/>
-                        </a:rPr>
-                        <a:t>으로 진행 하더라도</a:t>
-                      </a:r>
-                      <a:r>
-                        <a:rPr kumimoji="0" lang="en-US" altLang="ko-KR" sz="1050" b="0" i="0" u="none" strike="noStrike" kern="1200" cap="none" spc="0" normalizeH="0" baseline="0" noProof="0" smtClean="0">
-                          <a:ln>
-                            <a:noFill/>
-                          </a:ln>
-                          <a:solidFill>
-                            <a:srgbClr val="0000FF"/>
-                          </a:solidFill>
-                          <a:effectLst/>
-                          <a:uLnTx/>
-                          <a:uFillTx/>
-                          <a:latin typeface="현대하모니 L" panose="02020603020101020101" pitchFamily="18" charset="-127"/>
-                          <a:ea typeface="현대하모니 L" panose="02020603020101020101" pitchFamily="18" charset="-127"/>
-                          <a:cs typeface="+mn-cs"/>
-                          <a:sym typeface="Wingdings" panose="05000000000000000000" pitchFamily="2" charset="2"/>
-                        </a:rPr>
-                        <a:t>, SV, BJ1</a:t>
-                      </a:r>
-                      <a:r>
-                        <a:rPr kumimoji="0" lang="ko-KR" altLang="en-US" sz="1050" b="0" i="0" u="none" strike="noStrike" kern="1200" cap="none" spc="0" normalizeH="0" baseline="0" noProof="0" smtClean="0">
-                          <a:ln>
-                            <a:noFill/>
-                          </a:ln>
-                          <a:solidFill>
-                            <a:srgbClr val="0000FF"/>
-                          </a:solidFill>
-                          <a:effectLst/>
-                          <a:uLnTx/>
-                          <a:uFillTx/>
-                          <a:latin typeface="현대하모니 L" panose="02020603020101020101" pitchFamily="18" charset="-127"/>
-                          <a:ea typeface="현대하모니 L" panose="02020603020101020101" pitchFamily="18" charset="-127"/>
-                          <a:cs typeface="+mn-cs"/>
-                          <a:sym typeface="Wingdings" panose="05000000000000000000" pitchFamily="2" charset="2"/>
-                        </a:rPr>
-                        <a:t>에서는 명확한</a:t>
-                      </a:r>
-                      <a:endParaRPr kumimoji="0" lang="en-US" altLang="ko-KR" sz="1050" b="0" i="0" u="none" strike="noStrike" kern="1200" cap="none" spc="0" normalizeH="0" baseline="0" noProof="0" smtClean="0">
+                      <a:endParaRPr kumimoji="0" lang="en-US" altLang="ko-KR" sz="1000" b="0" i="0" u="none" strike="noStrike" kern="1200" cap="none" spc="0" normalizeH="0" baseline="0" noProof="0" smtClean="0">
                         <a:ln>
                           <a:noFill/>
                         </a:ln>
@@ -11675,7 +11535,7 @@
                         <a:defRPr/>
                       </a:pPr>
                       <a:r>
-                        <a:rPr kumimoji="0" lang="en-US" altLang="ko-KR" sz="1050" b="0" i="0" u="none" strike="noStrike" kern="1200" cap="none" spc="0" normalizeH="0" baseline="0" noProof="0" smtClean="0">
+                        <a:rPr kumimoji="0" lang="en-US" altLang="ko-KR" sz="1000" b="0" i="0" u="none" strike="noStrike" kern="1200" cap="none" spc="0" normalizeH="0" baseline="0" noProof="0" smtClean="0">
                           <a:ln>
                             <a:noFill/>
                           </a:ln>
@@ -11690,10 +11550,10 @@
                           <a:cs typeface="+mn-cs"/>
                           <a:sym typeface="Wingdings" panose="05000000000000000000" pitchFamily="2" charset="2"/>
                         </a:rPr>
-                        <a:t>     </a:t>
+                        <a:t>      HVAC Inlet </a:t>
                       </a:r>
                       <a:r>
-                        <a:rPr kumimoji="0" lang="ko-KR" altLang="en-US" sz="1050" b="0" i="0" u="none" strike="noStrike" kern="1200" cap="none" spc="0" normalizeH="0" baseline="0" noProof="0" smtClean="0">
+                        <a:rPr kumimoji="0" lang="ko-KR" altLang="en-US" sz="1000" b="0" i="0" u="none" strike="noStrike" kern="1200" cap="none" spc="0" normalizeH="0" baseline="0" noProof="0" smtClean="0">
                           <a:ln>
                             <a:noFill/>
                           </a:ln>
@@ -11708,9 +11568,9 @@
                           <a:cs typeface="+mn-cs"/>
                           <a:sym typeface="Wingdings" panose="05000000000000000000" pitchFamily="2" charset="2"/>
                         </a:rPr>
-                        <a:t>원인분석 후 대처 필요 </a:t>
+                        <a:t>부터 좌우 온도 편차 발생</a:t>
                       </a:r>
-                      <a:endParaRPr kumimoji="0" lang="en-US" altLang="ko-KR" sz="1050" b="0" i="0" u="none" strike="noStrike" kern="1200" cap="none" spc="0" normalizeH="0" baseline="0" noProof="0" smtClean="0">
+                      <a:endParaRPr kumimoji="0" lang="en-US" altLang="ko-KR" sz="1000" b="0" i="0" u="none" strike="noStrike" kern="1200" cap="none" spc="0" normalizeH="0" baseline="0" noProof="0" smtClean="0">
                         <a:ln>
                           <a:noFill/>
                         </a:ln>
@@ -11727,9 +11587,9 @@
                       </a:endParaRPr>
                     </a:p>
                     <a:p>
-                      <a:pPr marL="0" marR="0" lvl="0" indent="0" algn="l" defTabSz="914400" rtl="0" eaLnBrk="1" fontAlgn="base" latinLnBrk="1" hangingPunct="1">
+                      <a:pPr marL="180975" marR="0" lvl="1" indent="0" algn="l" defTabSz="914400" rtl="0" eaLnBrk="1" latinLnBrk="1" hangingPunct="1">
                         <a:lnSpc>
-                          <a:spcPct val="100000"/>
+                          <a:spcPct val="110000"/>
                         </a:lnSpc>
                         <a:spcBef>
                           <a:spcPct val="20000"/>
@@ -11737,13 +11597,9 @@
                         <a:spcAft>
                           <a:spcPct val="0"/>
                         </a:spcAft>
-                        <a:buClr>
-                          <a:srgbClr val="FF0000"/>
-                        </a:buClr>
-                        <a:buSzTx/>
-                        <a:buFont typeface="Wingdings" pitchFamily="2" charset="2"/>
+                        <a:buClrTx/>
+                        <a:buFont typeface="Wingdings" panose="05000000000000000000" pitchFamily="2" charset="2"/>
                         <a:buNone/>
-                        <a:tabLst/>
                         <a:defRPr/>
                       </a:pPr>
                       <a:endParaRPr kumimoji="1" lang="en-US" altLang="ko-KR" sz="1000" b="0" i="0" u="none" strike="noStrike" kern="1200" cap="none" normalizeH="0" baseline="0" smtClean="0">
@@ -12645,22 +12501,7 @@
                           <a:ea typeface="+mn-ea"/>
                           <a:cs typeface="+mn-cs"/>
                         </a:rPr>
-                        <a:t>   </a:t>
-                      </a:r>
-                      <a:r>
-                        <a:rPr kumimoji="1" lang="en-US" altLang="ko-KR" sz="1000" b="0" i="0" u="none" strike="noStrike" kern="1200" cap="none" normalizeH="0" baseline="0" smtClean="0">
-                          <a:ln>
-                            <a:noFill/>
-                          </a:ln>
-                          <a:solidFill>
-                            <a:srgbClr val="0000FF"/>
-                          </a:solidFill>
-                          <a:effectLst/>
-                          <a:latin typeface="+mn-lt"/>
-                          <a:ea typeface="+mn-ea"/>
-                          <a:cs typeface="+mn-cs"/>
-                        </a:rPr>
-                        <a:t>- </a:t>
+                        <a:t>   - </a:t>
                       </a:r>
                       <a:r>
                         <a:rPr kumimoji="1" lang="ko-KR" altLang="en-US" sz="1000" b="0" i="0" u="none" strike="noStrike" kern="1200" cap="none" normalizeH="0" baseline="0" smtClean="0">
@@ -12908,7 +12749,24 @@
                           <a:ea typeface="현대하모니 L" panose="02020603020101020101" pitchFamily="18" charset="-127"/>
                           <a:cs typeface="+mn-cs"/>
                         </a:rPr>
-                        <a:t>, 15</a:t>
+                        <a:t>, </a:t>
+                      </a:r>
+                      <a:r>
+                        <a:rPr kumimoji="0" lang="en-US" altLang="ko-KR" sz="1050" b="0" i="0" u="none" strike="noStrike" kern="1200" cap="none" spc="0" normalizeH="0" baseline="0" noProof="0" smtClean="0">
+                          <a:ln>
+                            <a:noFill/>
+                          </a:ln>
+                          <a:solidFill>
+                            <a:srgbClr val="0000FF"/>
+                          </a:solidFill>
+                          <a:effectLst/>
+                          <a:uLnTx/>
+                          <a:uFillTx/>
+                          <a:latin typeface="현대하모니 L" panose="02020603020101020101" pitchFamily="18" charset="-127"/>
+                          <a:ea typeface="현대하모니 L" panose="02020603020101020101" pitchFamily="18" charset="-127"/>
+                          <a:cs typeface="+mn-cs"/>
+                        </a:rPr>
+                        <a:t>10</a:t>
                       </a:r>
                       <a:r>
                         <a:rPr kumimoji="0" lang="ko-KR" altLang="en-US" sz="1050" b="0" i="0" u="none" strike="noStrike" kern="1200" cap="none" spc="0" normalizeH="0" baseline="0" noProof="0" smtClean="0">
@@ -12925,7 +12783,24 @@
                           <a:ea typeface="현대하모니 L" panose="02020603020101020101" pitchFamily="18" charset="-127"/>
                           <a:cs typeface="+mn-cs"/>
                         </a:rPr>
-                        <a:t>℃ 좌우 온도 편차 검증 </a:t>
+                        <a:t>℃ </a:t>
+                      </a:r>
+                      <a:r>
+                        <a:rPr kumimoji="0" lang="ko-KR" altLang="en-US" sz="1050" b="0" i="0" u="none" strike="noStrike" kern="1200" cap="none" spc="0" normalizeH="0" baseline="0" noProof="0" smtClean="0">
+                          <a:ln>
+                            <a:noFill/>
+                          </a:ln>
+                          <a:solidFill>
+                            <a:srgbClr val="0000FF"/>
+                          </a:solidFill>
+                          <a:effectLst/>
+                          <a:uLnTx/>
+                          <a:uFillTx/>
+                          <a:latin typeface="현대하모니 L" panose="02020603020101020101" pitchFamily="18" charset="-127"/>
+                          <a:ea typeface="현대하모니 L" panose="02020603020101020101" pitchFamily="18" charset="-127"/>
+                          <a:cs typeface="+mn-cs"/>
+                        </a:rPr>
+                        <a:t>좌우 온도 편차 검증 </a:t>
                       </a:r>
                       <a:r>
                         <a:rPr kumimoji="0" lang="en-US" altLang="ko-KR" sz="1050" b="0" i="0" u="none" strike="noStrike" kern="1200" cap="none" spc="0" normalizeH="0" baseline="0" noProof="0" smtClean="0">
@@ -16336,21 +16211,6 @@
                         </a:rPr>
                         <a:t>)</a:t>
                       </a:r>
-                      <a:endParaRPr kumimoji="1" lang="en-US" altLang="ko-KR" sz="1000" b="0" i="0" u="none" strike="noStrike" kern="1200" cap="none" spc="0" normalizeH="0" baseline="0" noProof="0" smtClean="0">
-                        <a:ln>
-                          <a:noFill/>
-                        </a:ln>
-                        <a:solidFill>
-                          <a:srgbClr val="0000FF"/>
-                        </a:solidFill>
-                        <a:effectLst/>
-                        <a:uLnTx/>
-                        <a:uFillTx/>
-                        <a:latin typeface="+mn-lt"/>
-                        <a:ea typeface="+mn-ea"/>
-                        <a:cs typeface="+mn-cs"/>
-                        <a:sym typeface="Wingdings" pitchFamily="2" charset="2"/>
-                      </a:endParaRPr>
                     </a:p>
                   </a:txBody>
                   <a:tcPr marL="86400" marR="86400" marT="43172" marB="43172" horzOverflow="overflow">
@@ -22417,7 +22277,7 @@
           <p:nvPr>
             <p:extLst>
               <p:ext uri="{D42A27DB-BD31-4B8C-83A1-F6EECF244321}">
-                <p14:modId xmlns:p14="http://schemas.microsoft.com/office/powerpoint/2010/main" val="3748405233"/>
+                <p14:modId xmlns:p14="http://schemas.microsoft.com/office/powerpoint/2010/main" val="1833784584"/>
               </p:ext>
             </p:extLst>
           </p:nvPr>
@@ -23115,7 +22975,7 @@
                         <a:defRPr/>
                       </a:pPr>
                       <a:r>
-                        <a:rPr kumimoji="1" lang="en-US" altLang="ko-KR" sz="1000" b="1" i="0" u="none" strike="noStrike" kern="1200" cap="none" normalizeH="0" baseline="0" smtClean="0">
+                        <a:rPr kumimoji="1" lang="en-US" altLang="ko-KR" sz="1000" b="0" i="0" u="none" strike="noStrike" kern="1200" cap="none" normalizeH="0" baseline="0" smtClean="0">
                           <a:ln>
                             <a:noFill/>
                           </a:ln>
@@ -23130,7 +22990,7 @@
                         <a:t>1. Proto </a:t>
                       </a:r>
                       <a:r>
-                        <a:rPr kumimoji="1" lang="ko-KR" altLang="en-US" sz="1000" b="1" i="0" u="none" strike="noStrike" kern="1200" cap="none" normalizeH="0" baseline="0" smtClean="0">
+                        <a:rPr kumimoji="1" lang="ko-KR" altLang="en-US" sz="1000" b="0" i="0" u="none" strike="noStrike" kern="1200" cap="none" normalizeH="0" baseline="0" smtClean="0">
                           <a:ln>
                             <a:noFill/>
                           </a:ln>
@@ -23144,7 +23004,7 @@
                         </a:rPr>
                         <a:t>납품 준비 </a:t>
                       </a:r>
-                      <a:endParaRPr kumimoji="1" lang="en-US" altLang="ko-KR" sz="1000" b="1" i="0" u="none" strike="noStrike" kern="1200" cap="none" normalizeH="0" baseline="0" smtClean="0">
+                      <a:endParaRPr kumimoji="1" lang="en-US" altLang="ko-KR" sz="1000" b="0" i="0" u="none" strike="noStrike" kern="1200" cap="none" normalizeH="0" baseline="0" smtClean="0">
                         <a:ln>
                           <a:noFill/>
                         </a:ln>
@@ -23178,7 +23038,7 @@
                         <a:defRPr/>
                       </a:pPr>
                       <a:r>
-                        <a:rPr kumimoji="1" lang="en-US" altLang="ko-KR" sz="1000" b="1" i="0" u="none" strike="noStrike" kern="1200" cap="none" normalizeH="0" baseline="0" smtClean="0">
+                        <a:rPr kumimoji="1" lang="en-US" altLang="ko-KR" sz="1000" b="0" i="0" u="none" strike="noStrike" kern="1200" cap="none" normalizeH="0" baseline="0" smtClean="0">
                           <a:ln>
                             <a:noFill/>
                           </a:ln>
@@ -23193,7 +23053,7 @@
                         <a:t>     - </a:t>
                       </a:r>
                       <a:r>
-                        <a:rPr kumimoji="1" lang="ko-KR" altLang="en-US" sz="1000" b="1" i="0" u="none" strike="noStrike" kern="1200" cap="none" normalizeH="0" baseline="0" smtClean="0">
+                        <a:rPr kumimoji="1" lang="ko-KR" altLang="en-US" sz="1000" b="0" i="0" u="none" strike="noStrike" kern="1200" cap="none" normalizeH="0" baseline="0" smtClean="0">
                           <a:ln>
                             <a:noFill/>
                           </a:ln>
@@ -23208,7 +23068,7 @@
                         <a:t>한온 샘플 입고일 </a:t>
                       </a:r>
                       <a:r>
-                        <a:rPr kumimoji="1" lang="en-US" altLang="ko-KR" sz="1000" b="1" i="0" u="none" strike="noStrike" kern="1200" cap="none" normalizeH="0" baseline="0" smtClean="0">
+                        <a:rPr kumimoji="1" lang="en-US" altLang="ko-KR" sz="1000" b="0" i="0" u="none" strike="noStrike" kern="1200" cap="none" normalizeH="0" baseline="0" smtClean="0">
                           <a:ln>
                             <a:noFill/>
                           </a:ln>
@@ -23220,37 +23080,7 @@
                           <a:ea typeface="+mn-ea"/>
                           <a:cs typeface="+mn-cs"/>
                         </a:rPr>
-                        <a:t>: </a:t>
-                      </a:r>
-                      <a:r>
-                        <a:rPr kumimoji="1" lang="en-US" altLang="ko-KR" sz="1000" b="1" i="0" u="none" strike="noStrike" kern="1200" cap="none" normalizeH="0" baseline="0" smtClean="0">
-                          <a:ln>
-                            <a:noFill/>
-                          </a:ln>
-                          <a:solidFill>
-                            <a:srgbClr val="0000FF"/>
-                          </a:solidFill>
-                          <a:effectLst/>
-                          <a:latin typeface="+mn-lt"/>
-                          <a:ea typeface="+mn-ea"/>
-                          <a:cs typeface="+mn-cs"/>
-                        </a:rPr>
-                        <a:t>7/16 </a:t>
-                      </a:r>
-                      <a:r>
-                        <a:rPr kumimoji="1" lang="en-US" altLang="ko-KR" sz="1000" b="1" i="0" u="none" strike="noStrike" kern="1200" cap="none" normalizeH="0" baseline="0" smtClean="0">
-                          <a:ln>
-                            <a:noFill/>
-                          </a:ln>
-                          <a:solidFill>
-                            <a:srgbClr val="0000FF"/>
-                          </a:solidFill>
-                          <a:effectLst/>
-                          <a:latin typeface="+mn-lt"/>
-                          <a:ea typeface="+mn-ea"/>
-                          <a:cs typeface="+mn-cs"/>
-                        </a:rPr>
-                        <a:t>(75EA)</a:t>
+                        <a:t>: 7/16 (75EA)</a:t>
                       </a:r>
                     </a:p>
                     <a:p>
@@ -23274,7 +23104,7 @@
                         <a:defRPr/>
                       </a:pPr>
                       <a:r>
-                        <a:rPr kumimoji="1" lang="en-US" altLang="ko-KR" sz="1000" b="1" i="0" u="none" strike="noStrike" kern="1200" cap="none" normalizeH="0" baseline="0" smtClean="0">
+                        <a:rPr kumimoji="1" lang="en-US" altLang="ko-KR" sz="1000" b="0" i="0" u="none" strike="noStrike" kern="1200" cap="none" normalizeH="0" baseline="0" smtClean="0">
                           <a:ln>
                             <a:noFill/>
                           </a:ln>
@@ -23289,7 +23119,7 @@
                         <a:t>     - </a:t>
                       </a:r>
                       <a:r>
-                        <a:rPr kumimoji="1" lang="ko-KR" altLang="en-US" sz="1000" b="1" i="0" u="none" strike="noStrike" kern="1200" cap="none" normalizeH="0" baseline="0" smtClean="0">
+                        <a:rPr kumimoji="1" lang="ko-KR" altLang="en-US" sz="1000" b="0" i="0" u="none" strike="noStrike" kern="1200" cap="none" normalizeH="0" baseline="0" smtClean="0">
                           <a:ln>
                             <a:noFill/>
                           </a:ln>
@@ -23304,7 +23134,7 @@
                         <a:t>로직 점검 진행 </a:t>
                       </a:r>
                       <a:r>
-                        <a:rPr kumimoji="1" lang="en-US" altLang="ko-KR" sz="1000" b="1" i="0" u="none" strike="noStrike" kern="1200" cap="none" normalizeH="0" baseline="0" smtClean="0">
+                        <a:rPr kumimoji="1" lang="en-US" altLang="ko-KR" sz="1000" b="0" i="0" u="none" strike="noStrike" kern="1200" cap="none" normalizeH="0" baseline="0" smtClean="0">
                           <a:ln>
                             <a:noFill/>
                           </a:ln>
@@ -23340,7 +23170,7 @@
                         <a:defRPr/>
                       </a:pPr>
                       <a:r>
-                        <a:rPr kumimoji="1" lang="en-US" altLang="ko-KR" sz="1000" b="1" i="0" u="none" strike="noStrike" kern="1200" cap="none" normalizeH="0" baseline="0" smtClean="0">
+                        <a:rPr kumimoji="1" lang="en-US" altLang="ko-KR" sz="1000" b="0" i="0" u="none" strike="noStrike" kern="1200" cap="none" normalizeH="0" baseline="0" smtClean="0">
                           <a:ln>
                             <a:noFill/>
                           </a:ln>
@@ -23355,7 +23185,7 @@
                         <a:t>      </a:t>
                       </a:r>
                       <a:r>
-                        <a:rPr kumimoji="1" lang="en-US" altLang="ko-KR" sz="1000" b="1" i="0" u="none" strike="noStrike" kern="1200" cap="none" normalizeH="0" baseline="0" smtClean="0">
+                        <a:rPr kumimoji="1" lang="en-US" altLang="ko-KR" sz="1000" b="0" i="0" u="none" strike="noStrike" kern="1200" cap="none" normalizeH="0" baseline="0" smtClean="0">
                           <a:ln>
                             <a:noFill/>
                           </a:ln>
@@ -23371,7 +23201,7 @@
                         <a:t> QV </a:t>
                       </a:r>
                       <a:r>
-                        <a:rPr kumimoji="1" lang="ko-KR" altLang="en-US" sz="1000" b="1" i="0" u="none" strike="noStrike" kern="1200" cap="none" normalizeH="0" baseline="0" smtClean="0">
+                        <a:rPr kumimoji="1" lang="ko-KR" altLang="en-US" sz="1000" b="0" i="0" u="none" strike="noStrike" kern="1200" cap="none" normalizeH="0" baseline="0" smtClean="0">
                           <a:ln>
                             <a:noFill/>
                           </a:ln>
@@ -23387,7 +23217,7 @@
                         <a:t>및 칼로리 예약 불가에 따른 </a:t>
                       </a:r>
                       <a:r>
-                        <a:rPr kumimoji="1" lang="en-US" altLang="ko-KR" sz="1000" b="1" i="0" u="none" strike="noStrike" kern="1200" cap="none" normalizeH="0" baseline="0" smtClean="0">
+                        <a:rPr kumimoji="1" lang="en-US" altLang="ko-KR" sz="1000" b="0" i="0" u="none" strike="noStrike" kern="1200" cap="none" normalizeH="0" baseline="0" smtClean="0">
                           <a:ln>
                             <a:noFill/>
                           </a:ln>
@@ -23402,7 +23232,7 @@
                         </a:rPr>
                         <a:t>Delay</a:t>
                       </a:r>
-                      <a:endParaRPr kumimoji="1" lang="en-US" altLang="ko-KR" sz="1000" b="1" i="0" u="none" strike="noStrike" kern="1200" cap="none" normalizeH="0" baseline="0" smtClean="0">
+                      <a:endParaRPr kumimoji="1" lang="en-US" altLang="ko-KR" sz="1000" b="0" i="0" u="none" strike="noStrike" kern="1200" cap="none" normalizeH="0" baseline="0" smtClean="0">
                         <a:ln>
                           <a:noFill/>
                         </a:ln>
@@ -23436,7 +23266,7 @@
                         <a:defRPr/>
                       </a:pPr>
                       <a:r>
-                        <a:rPr kumimoji="1" lang="en-US" altLang="ko-KR" sz="1000" b="1" i="0" u="none" strike="noStrike" kern="1200" cap="none" normalizeH="0" baseline="0" smtClean="0">
+                        <a:rPr kumimoji="1" lang="en-US" altLang="ko-KR" sz="1000" b="0" i="0" u="none" strike="noStrike" kern="1200" cap="none" normalizeH="0" baseline="0" smtClean="0">
                           <a:ln>
                             <a:noFill/>
                           </a:ln>
@@ -23451,7 +23281,7 @@
                         <a:t>       : </a:t>
                       </a:r>
                       <a:r>
-                        <a:rPr kumimoji="1" lang="ko-KR" altLang="en-US" sz="1000" b="1" i="0" u="none" strike="noStrike" kern="1200" cap="none" normalizeH="0" baseline="0" smtClean="0">
+                        <a:rPr kumimoji="1" lang="ko-KR" altLang="en-US" sz="1000" b="0" i="0" u="none" strike="noStrike" kern="1200" cap="none" normalizeH="0" baseline="0" smtClean="0">
                           <a:ln>
                             <a:noFill/>
                           </a:ln>
@@ -23466,7 +23296,7 @@
                         <a:t>로직 점검 체크리스트에 따른 평가 </a:t>
                       </a:r>
                       <a:r>
-                        <a:rPr kumimoji="1" lang="en-US" altLang="ko-KR" sz="1000" b="1" i="0" u="none" strike="noStrike" kern="1200" cap="none" normalizeH="0" baseline="0" smtClean="0">
+                        <a:rPr kumimoji="1" lang="en-US" altLang="ko-KR" sz="1000" b="0" i="0" u="none" strike="noStrike" kern="1200" cap="none" normalizeH="0" baseline="0" smtClean="0">
                           <a:ln>
                             <a:noFill/>
                           </a:ln>
@@ -23502,7 +23332,7 @@
                         <a:defRPr/>
                       </a:pPr>
                       <a:r>
-                        <a:rPr kumimoji="1" lang="en-US" altLang="ko-KR" sz="1000" b="1" i="0" u="none" strike="noStrike" kern="1200" cap="none" normalizeH="0" baseline="0" smtClean="0">
+                        <a:rPr kumimoji="1" lang="en-US" altLang="ko-KR" sz="1000" b="0" i="0" u="none" strike="noStrike" kern="1200" cap="none" normalizeH="0" baseline="0" smtClean="0">
                           <a:ln>
                             <a:noFill/>
                           </a:ln>
@@ -23514,25 +23344,10 @@
                           <a:ea typeface="+mn-ea"/>
                           <a:cs typeface="+mn-cs"/>
                         </a:rPr>
-                        <a:t>       : </a:t>
+                        <a:t>       : MVa </a:t>
                       </a:r>
                       <a:r>
-                        <a:rPr kumimoji="1" lang="en-US" altLang="ko-KR" sz="1000" b="1" i="0" u="none" strike="noStrike" kern="1200" cap="none" normalizeH="0" baseline="0" smtClean="0">
-                          <a:ln>
-                            <a:noFill/>
-                          </a:ln>
-                          <a:solidFill>
-                            <a:srgbClr val="0000FF"/>
-                          </a:solidFill>
-                          <a:effectLst/>
-                          <a:latin typeface="+mn-lt"/>
-                          <a:ea typeface="+mn-ea"/>
-                          <a:cs typeface="+mn-cs"/>
-                        </a:rPr>
-                        <a:t>MVa </a:t>
-                      </a:r>
-                      <a:r>
-                        <a:rPr kumimoji="1" lang="ko-KR" altLang="en-US" sz="1000" b="1" i="0" u="none" strike="noStrike" kern="1200" cap="none" normalizeH="0" baseline="0" smtClean="0">
+                        <a:rPr kumimoji="1" lang="ko-KR" altLang="en-US" sz="1000" b="0" i="0" u="none" strike="noStrike" kern="1200" cap="none" normalizeH="0" baseline="0" smtClean="0">
                           <a:ln>
                             <a:noFill/>
                           </a:ln>
@@ -23547,7 +23362,7 @@
                         <a:t>실차 평가 </a:t>
                       </a:r>
                       <a:r>
-                        <a:rPr kumimoji="1" lang="en-US" altLang="ko-KR" sz="1000" b="1" i="0" u="none" strike="noStrike" kern="1200" cap="none" normalizeH="0" baseline="0" smtClean="0">
+                        <a:rPr kumimoji="1" lang="en-US" altLang="ko-KR" sz="1000" b="0" i="0" u="none" strike="noStrike" kern="1200" cap="none" normalizeH="0" baseline="0" smtClean="0">
                           <a:ln>
                             <a:noFill/>
                           </a:ln>
@@ -23562,7 +23377,7 @@
                         <a:t>Law </a:t>
                       </a:r>
                       <a:r>
-                        <a:rPr kumimoji="1" lang="ko-KR" altLang="en-US" sz="1000" b="1" i="0" u="none" strike="noStrike" kern="1200" cap="none" normalizeH="0" baseline="0" smtClean="0">
+                        <a:rPr kumimoji="1" lang="ko-KR" altLang="en-US" sz="1000" b="0" i="0" u="none" strike="noStrike" kern="1200" cap="none" normalizeH="0" baseline="0" smtClean="0">
                           <a:ln>
                             <a:noFill/>
                           </a:ln>
@@ -23574,24 +23389,9 @@
                           <a:ea typeface="+mn-ea"/>
                           <a:cs typeface="+mn-cs"/>
                         </a:rPr>
-                        <a:t>데이터를 활용한 시뮬레이션 </a:t>
+                        <a:t>데이터를 활용한 시뮬레이션 평가 </a:t>
                       </a:r>
-                      <a:r>
-                        <a:rPr kumimoji="1" lang="ko-KR" altLang="en-US" sz="1000" b="1" i="0" u="none" strike="noStrike" kern="1200" cap="none" normalizeH="0" baseline="0" smtClean="0">
-                          <a:ln>
-                            <a:noFill/>
-                          </a:ln>
-                          <a:solidFill>
-                            <a:srgbClr val="0000FF"/>
-                          </a:solidFill>
-                          <a:effectLst/>
-                          <a:latin typeface="+mn-lt"/>
-                          <a:ea typeface="+mn-ea"/>
-                          <a:cs typeface="+mn-cs"/>
-                        </a:rPr>
-                        <a:t>평가 </a:t>
-                      </a:r>
-                      <a:endParaRPr kumimoji="1" lang="en-US" altLang="ko-KR" sz="1000" b="1" i="0" u="none" strike="noStrike" kern="1200" cap="none" normalizeH="0" baseline="0" smtClean="0">
+                      <a:endParaRPr kumimoji="1" lang="en-US" altLang="ko-KR" sz="1000" b="0" i="0" u="none" strike="noStrike" kern="1200" cap="none" normalizeH="0" baseline="0" smtClean="0">
                         <a:ln>
                           <a:noFill/>
                         </a:ln>
@@ -23625,7 +23425,7 @@
                         <a:defRPr/>
                       </a:pPr>
                       <a:r>
-                        <a:rPr kumimoji="1" lang="en-US" altLang="ko-KR" sz="1000" b="1" i="0" u="none" strike="noStrike" kern="1200" cap="none" normalizeH="0" baseline="0" smtClean="0">
+                        <a:rPr kumimoji="1" lang="en-US" altLang="ko-KR" sz="1000" b="0" i="0" u="none" strike="noStrike" kern="1200" cap="none" normalizeH="0" baseline="0" smtClean="0">
                           <a:ln>
                             <a:noFill/>
                           </a:ln>
@@ -23637,9 +23437,24 @@
                           <a:ea typeface="+mn-ea"/>
                           <a:cs typeface="+mn-cs"/>
                         </a:rPr>
-                        <a:t>        (~7/15)</a:t>
+                        <a:t>        (~7/15</a:t>
                       </a:r>
-                      <a:endParaRPr kumimoji="1" lang="en-US" altLang="ko-KR" sz="1000" b="1" i="0" u="none" strike="noStrike" kern="1200" cap="none" normalizeH="0" baseline="0" smtClean="0">
+                      <a:r>
+                        <a:rPr kumimoji="1" lang="en-US" altLang="ko-KR" sz="1000" b="0" i="0" u="none" strike="noStrike" kern="1200" cap="none" normalizeH="0" baseline="0" smtClean="0">
+                          <a:ln>
+                            <a:noFill/>
+                          </a:ln>
+                          <a:solidFill>
+                            <a:srgbClr val="0000FF"/>
+                          </a:solidFill>
+                          <a:effectLst/>
+                          <a:latin typeface="+mn-lt"/>
+                          <a:ea typeface="+mn-ea"/>
+                          <a:cs typeface="+mn-cs"/>
+                        </a:rPr>
+                        <a:t>)</a:t>
+                      </a:r>
+                      <a:endParaRPr kumimoji="1" lang="en-US" altLang="ko-KR" sz="1000" b="0" i="0" u="none" strike="noStrike" kern="1200" cap="none" normalizeH="0" baseline="0" smtClean="0">
                         <a:ln>
                           <a:noFill/>
                         </a:ln>
@@ -23673,7 +23488,7 @@
                         <a:defRPr/>
                       </a:pPr>
                       <a:r>
-                        <a:rPr kumimoji="1" lang="en-US" altLang="ko-KR" sz="1000" b="1" i="0" u="none" strike="noStrike" kern="1200" cap="none" normalizeH="0" baseline="0" smtClean="0">
+                        <a:rPr kumimoji="1" lang="en-US" altLang="ko-KR" sz="1000" b="0" i="0" u="none" strike="noStrike" kern="1200" cap="none" normalizeH="0" baseline="0" smtClean="0">
                           <a:ln>
                             <a:noFill/>
                           </a:ln>
@@ -23685,25 +23500,10 @@
                           <a:ea typeface="+mn-ea"/>
                           <a:cs typeface="+mn-cs"/>
                         </a:rPr>
-                        <a:t>       </a:t>
+                        <a:t>       : </a:t>
                       </a:r>
                       <a:r>
-                        <a:rPr kumimoji="1" lang="en-US" altLang="ko-KR" sz="1000" b="1" i="0" u="none" strike="noStrike" kern="1200" cap="none" normalizeH="0" baseline="0" smtClean="0">
-                          <a:ln>
-                            <a:noFill/>
-                          </a:ln>
-                          <a:solidFill>
-                            <a:srgbClr val="0000FF"/>
-                          </a:solidFill>
-                          <a:effectLst/>
-                          <a:latin typeface="+mn-lt"/>
-                          <a:ea typeface="+mn-ea"/>
-                          <a:cs typeface="+mn-cs"/>
-                        </a:rPr>
-                        <a:t>: </a:t>
-                      </a:r>
-                      <a:r>
-                        <a:rPr kumimoji="1" lang="ko-KR" altLang="en-US" sz="1000" b="1" i="0" u="none" strike="noStrike" kern="1200" cap="none" normalizeH="0" baseline="0" smtClean="0">
+                        <a:rPr kumimoji="1" lang="ko-KR" altLang="en-US" sz="1000" b="0" i="0" u="none" strike="noStrike" kern="1200" cap="none" normalizeH="0" baseline="0" smtClean="0">
                           <a:ln>
                             <a:noFill/>
                           </a:ln>
@@ -23718,7 +23518,7 @@
                         <a:t>영하 </a:t>
                       </a:r>
                       <a:r>
-                        <a:rPr kumimoji="1" lang="en-US" altLang="ko-KR" sz="1000" b="1" i="0" u="none" strike="noStrike" kern="1200" cap="none" normalizeH="0" baseline="0" smtClean="0">
+                        <a:rPr kumimoji="1" lang="en-US" altLang="ko-KR" sz="1000" b="0" i="0" u="none" strike="noStrike" kern="1200" cap="none" normalizeH="0" baseline="0" smtClean="0">
                           <a:ln>
                             <a:noFill/>
                           </a:ln>
@@ -23733,7 +23533,7 @@
                         <a:t>40</a:t>
                       </a:r>
                       <a:r>
-                        <a:rPr kumimoji="1" lang="ko-KR" altLang="en-US" sz="1000" b="1" i="0" u="none" strike="noStrike" kern="1200" cap="none" normalizeH="0" baseline="0" smtClean="0">
+                        <a:rPr kumimoji="1" lang="ko-KR" altLang="en-US" sz="1000" b="0" i="0" u="none" strike="noStrike" kern="1200" cap="none" normalizeH="0" baseline="0" smtClean="0">
                           <a:ln>
                             <a:noFill/>
                           </a:ln>
@@ -23745,10 +23545,25 @@
                           <a:ea typeface="+mn-ea"/>
                           <a:cs typeface="+mn-cs"/>
                         </a:rPr>
-                        <a:t>℃ 조건에서 </a:t>
+                        <a:t>℃ </a:t>
                       </a:r>
                       <a:r>
-                        <a:rPr kumimoji="1" lang="en-US" altLang="ko-KR" sz="1000" b="1" i="0" u="none" strike="noStrike" kern="1200" cap="none" normalizeH="0" baseline="0" smtClean="0">
+                        <a:rPr kumimoji="1" lang="ko-KR" altLang="en-US" sz="1000" b="0" i="0" u="none" strike="noStrike" kern="1200" cap="none" normalizeH="0" baseline="0" smtClean="0">
+                          <a:ln>
+                            <a:noFill/>
+                          </a:ln>
+                          <a:solidFill>
+                            <a:srgbClr val="0000FF"/>
+                          </a:solidFill>
+                          <a:effectLst/>
+                          <a:latin typeface="+mn-lt"/>
+                          <a:ea typeface="+mn-ea"/>
+                          <a:cs typeface="+mn-cs"/>
+                        </a:rPr>
+                        <a:t>조건에서 </a:t>
+                      </a:r>
+                      <a:r>
+                        <a:rPr kumimoji="1" lang="en-US" altLang="ko-KR" sz="1000" b="0" i="0" u="none" strike="noStrike" kern="1200" cap="none" normalizeH="0" baseline="0" smtClean="0">
                           <a:ln>
                             <a:noFill/>
                           </a:ln>
@@ -23763,7 +23578,7 @@
                         <a:t>R </a:t>
                       </a:r>
                       <a:r>
-                        <a:rPr kumimoji="1" lang="ko-KR" altLang="en-US" sz="1000" b="1" i="0" u="none" strike="noStrike" kern="1200" cap="none" normalizeH="0" baseline="0" smtClean="0">
+                        <a:rPr kumimoji="1" lang="ko-KR" altLang="en-US" sz="1000" b="0" i="0" u="none" strike="noStrike" kern="1200" cap="none" normalizeH="0" baseline="0" smtClean="0">
                           <a:ln>
                             <a:noFill/>
                           </a:ln>
@@ -23775,10 +23590,10 @@
                           <a:ea typeface="+mn-ea"/>
                           <a:cs typeface="+mn-cs"/>
                         </a:rPr>
-                        <a:t>로직 </a:t>
+                        <a:t>로직 검증 </a:t>
                       </a:r>
                       <a:r>
-                        <a:rPr kumimoji="1" lang="ko-KR" altLang="en-US" sz="1000" b="1" i="0" u="none" strike="noStrike" kern="1200" cap="none" normalizeH="0" baseline="0" smtClean="0">
+                        <a:rPr kumimoji="1" lang="en-US" altLang="ko-KR" sz="1000" b="0" i="0" u="none" strike="noStrike" kern="1200" cap="none" normalizeH="0" baseline="0" smtClean="0">
                           <a:ln>
                             <a:noFill/>
                           </a:ln>
@@ -23790,10 +23605,10 @@
                           <a:ea typeface="+mn-ea"/>
                           <a:cs typeface="+mn-cs"/>
                         </a:rPr>
-                        <a:t>검증 </a:t>
+                        <a:t>(~</a:t>
                       </a:r>
                       <a:r>
-                        <a:rPr kumimoji="1" lang="en-US" altLang="ko-KR" sz="1000" b="1" i="0" u="none" strike="noStrike" kern="1200" cap="none" normalizeH="0" baseline="0" smtClean="0">
+                        <a:rPr kumimoji="1" lang="en-US" altLang="ko-KR" sz="1000" b="0" i="0" u="none" strike="noStrike" kern="1200" cap="none" normalizeH="0" baseline="0" smtClean="0">
                           <a:ln>
                             <a:noFill/>
                           </a:ln>
@@ -23805,166 +23620,10 @@
                           <a:ea typeface="+mn-ea"/>
                           <a:cs typeface="+mn-cs"/>
                         </a:rPr>
-                        <a:t>(~7/15)</a:t>
-                      </a:r>
-                      <a:endParaRPr kumimoji="1" lang="en-US" altLang="ko-KR" sz="1000" b="1" i="0" u="none" strike="noStrike" kern="1200" cap="none" normalizeH="0" baseline="0" smtClean="0">
-                        <a:ln>
-                          <a:noFill/>
-                        </a:ln>
-                        <a:solidFill>
-                          <a:srgbClr val="0000FF"/>
-                        </a:solidFill>
-                        <a:effectLst/>
-                        <a:latin typeface="+mn-lt"/>
-                        <a:ea typeface="+mn-ea"/>
-                        <a:cs typeface="+mn-cs"/>
-                      </a:endParaRPr>
-                    </a:p>
-                    <a:p>
-                      <a:pPr marL="0" marR="0" lvl="0" indent="0" algn="l" defTabSz="914400" rtl="0" eaLnBrk="1" fontAlgn="base" latinLnBrk="1" hangingPunct="1">
-                        <a:lnSpc>
-                          <a:spcPct val="100000"/>
-                        </a:lnSpc>
-                        <a:spcBef>
-                          <a:spcPct val="20000"/>
-                        </a:spcBef>
-                        <a:spcAft>
-                          <a:spcPct val="0"/>
-                        </a:spcAft>
-                        <a:buClr>
-                          <a:srgbClr val="FF0000"/>
-                        </a:buClr>
-                        <a:buSzTx/>
-                        <a:buFont typeface="Wingdings" pitchFamily="2" charset="2"/>
-                        <a:buNone/>
-                        <a:tabLst/>
-                        <a:defRPr/>
-                      </a:pPr>
-                      <a:endParaRPr kumimoji="1" lang="en-US" altLang="ko-KR" sz="1000" b="1" i="0" u="none" strike="noStrike" kern="1200" cap="none" normalizeH="0" baseline="0" smtClean="0">
-                        <a:ln>
-                          <a:noFill/>
-                        </a:ln>
-                        <a:solidFill>
-                          <a:srgbClr val="0000FF"/>
-                        </a:solidFill>
-                        <a:effectLst/>
-                        <a:latin typeface="+mn-lt"/>
-                        <a:ea typeface="+mn-ea"/>
-                        <a:cs typeface="+mn-cs"/>
-                      </a:endParaRPr>
-                    </a:p>
-                    <a:p>
-                      <a:pPr marL="0" marR="0" lvl="0" indent="0" algn="l" defTabSz="914400" rtl="0" eaLnBrk="1" fontAlgn="base" latinLnBrk="1" hangingPunct="1">
-                        <a:lnSpc>
-                          <a:spcPct val="100000"/>
-                        </a:lnSpc>
-                        <a:spcBef>
-                          <a:spcPct val="20000"/>
-                        </a:spcBef>
-                        <a:spcAft>
-                          <a:spcPct val="0"/>
-                        </a:spcAft>
-                        <a:buClr>
-                          <a:srgbClr val="FF0000"/>
-                        </a:buClr>
-                        <a:buSzTx/>
-                        <a:buFont typeface="Wingdings" pitchFamily="2" charset="2"/>
-                        <a:buNone/>
-                        <a:tabLst/>
-                        <a:defRPr/>
-                      </a:pPr>
-                      <a:r>
-                        <a:rPr kumimoji="1" lang="en-US" altLang="ko-KR" sz="1000" b="1" i="0" u="none" strike="noStrike" kern="1200" cap="none" normalizeH="0" baseline="0" smtClean="0">
-                          <a:ln>
-                            <a:noFill/>
-                          </a:ln>
-                          <a:solidFill>
-                            <a:srgbClr val="0000FF"/>
-                          </a:solidFill>
-                          <a:effectLst/>
-                          <a:latin typeface="+mn-lt"/>
-                          <a:ea typeface="+mn-ea"/>
-                          <a:cs typeface="+mn-cs"/>
-                        </a:rPr>
-                        <a:t>2. R</a:t>
+                        <a:t>7/15</a:t>
                       </a:r>
                       <a:r>
-                        <a:rPr kumimoji="1" lang="ko-KR" altLang="en-US" sz="1000" b="1" i="0" u="none" strike="noStrike" kern="1200" cap="none" normalizeH="0" baseline="0" smtClean="0">
-                          <a:ln>
-                            <a:noFill/>
-                          </a:ln>
-                          <a:solidFill>
-                            <a:srgbClr val="0000FF"/>
-                          </a:solidFill>
-                          <a:effectLst/>
-                          <a:latin typeface="+mn-lt"/>
-                          <a:ea typeface="+mn-ea"/>
-                          <a:cs typeface="+mn-cs"/>
-                        </a:rPr>
-                        <a:t>로직 튜닝에 따른 </a:t>
-                      </a:r>
-                      <a:r>
-                        <a:rPr kumimoji="1" lang="en-US" altLang="ko-KR" sz="1000" b="1" i="0" u="none" strike="noStrike" kern="1200" cap="none" normalizeH="0" baseline="0" smtClean="0">
-                          <a:ln>
-                            <a:noFill/>
-                          </a:ln>
-                          <a:solidFill>
-                            <a:srgbClr val="0000FF"/>
-                          </a:solidFill>
-                          <a:effectLst/>
-                          <a:latin typeface="+mn-lt"/>
-                          <a:ea typeface="+mn-ea"/>
-                          <a:cs typeface="+mn-cs"/>
-                        </a:rPr>
-                        <a:t>HVAC </a:t>
-                      </a:r>
-                      <a:r>
-                        <a:rPr kumimoji="1" lang="ko-KR" altLang="en-US" sz="1000" b="1" i="0" u="none" strike="noStrike" kern="1200" cap="none" normalizeH="0" baseline="0" smtClean="0">
-                          <a:ln>
-                            <a:noFill/>
-                          </a:ln>
-                          <a:solidFill>
-                            <a:srgbClr val="0000FF"/>
-                          </a:solidFill>
-                          <a:effectLst/>
-                          <a:latin typeface="+mn-lt"/>
-                          <a:ea typeface="+mn-ea"/>
-                          <a:cs typeface="+mn-cs"/>
-                        </a:rPr>
-                        <a:t>요청 </a:t>
-                      </a:r>
-                      <a:r>
-                        <a:rPr kumimoji="1" lang="en-US" altLang="ko-KR" sz="1000" b="1" i="0" u="none" strike="noStrike" kern="1200" cap="none" normalizeH="0" baseline="0" smtClean="0">
-                          <a:ln>
-                            <a:noFill/>
-                          </a:ln>
-                          <a:solidFill>
-                            <a:srgbClr val="0000FF"/>
-                          </a:solidFill>
-                          <a:effectLst/>
-                          <a:latin typeface="+mn-lt"/>
-                          <a:ea typeface="+mn-ea"/>
-                          <a:cs typeface="+mn-cs"/>
-                        </a:rPr>
-                        <a:t>(To </a:t>
-                      </a:r>
-                      <a:r>
-                        <a:rPr kumimoji="1" lang="ko-KR" altLang="en-US" sz="1000" b="1" i="0" u="none" strike="noStrike" kern="1200" cap="none" normalizeH="0" baseline="0" smtClean="0">
-                          <a:ln>
-                            <a:noFill/>
-                          </a:ln>
-                          <a:solidFill>
-                            <a:srgbClr val="0000FF"/>
-                          </a:solidFill>
-                          <a:effectLst/>
-                          <a:latin typeface="+mn-lt"/>
-                          <a:ea typeface="+mn-ea"/>
-                          <a:cs typeface="+mn-cs"/>
-                        </a:rPr>
-                        <a:t>기구팀</a:t>
-                      </a:r>
-                      <a:r>
-                        <a:rPr kumimoji="1" lang="en-US" altLang="ko-KR" sz="1000" b="1" i="0" u="none" strike="noStrike" kern="1200" cap="none" normalizeH="0" baseline="0" smtClean="0">
+                        <a:rPr kumimoji="1" lang="en-US" altLang="ko-KR" sz="1000" b="0" i="0" u="none" strike="noStrike" kern="1200" cap="none" normalizeH="0" baseline="0" smtClean="0">
                           <a:ln>
                             <a:noFill/>
                           </a:ln>
@@ -24000,10 +23659,7 @@
                         <a:defRPr/>
                       </a:pPr>
                       <a:r>
-                        <a:rPr kumimoji="1" lang="en-US" altLang="ko-KR" sz="1000" b="1" i="0" u="none" strike="noStrike" kern="1200" cap="none" normalizeH="0" baseline="0" smtClean="0">
-                          <a:ln>
-                            <a:noFill/>
-                          </a:ln>
+                        <a:rPr lang="en-US" altLang="ko-KR" sz="1000" b="0" i="0" kern="1200" smtClean="0">
                           <a:solidFill>
                             <a:srgbClr val="0000FF"/>
                           </a:solidFill>
@@ -24012,13 +23668,10 @@
                           <a:ea typeface="+mn-ea"/>
                           <a:cs typeface="+mn-cs"/>
                         </a:rPr>
-                        <a:t>      - 8</a:t>
+                        <a:t>     -</a:t>
                       </a:r>
                       <a:r>
-                        <a:rPr kumimoji="1" lang="ko-KR" altLang="en-US" sz="1000" b="1" i="0" u="none" strike="noStrike" kern="1200" cap="none" normalizeH="0" baseline="0" smtClean="0">
-                          <a:ln>
-                            <a:noFill/>
-                          </a:ln>
+                        <a:rPr lang="en-US" altLang="ko-KR" sz="1000" b="0" i="0" kern="1200" baseline="0" smtClean="0">
                           <a:solidFill>
                             <a:srgbClr val="0000FF"/>
                           </a:solidFill>
@@ -24027,12 +23680,57 @@
                           <a:ea typeface="+mn-ea"/>
                           <a:cs typeface="+mn-cs"/>
                         </a:rPr>
-                        <a:t>월 중순 입고 예정</a:t>
+                        <a:t> </a:t>
                       </a:r>
-                      <a:endParaRPr kumimoji="1" lang="en-US" altLang="ko-KR" sz="1000" b="1" i="0" u="none" strike="noStrike" kern="1200" cap="none" normalizeH="0" baseline="0" smtClean="0">
-                        <a:ln>
-                          <a:noFill/>
-                        </a:ln>
+                      <a:r>
+                        <a:rPr lang="ko-KR" altLang="en-US" sz="1000" b="0" i="0" kern="1200" baseline="0" smtClean="0">
+                          <a:solidFill>
+                            <a:srgbClr val="0000FF"/>
+                          </a:solidFill>
+                          <a:effectLst/>
+                          <a:latin typeface="+mn-lt"/>
+                          <a:ea typeface="+mn-ea"/>
+                          <a:cs typeface="+mn-cs"/>
+                        </a:rPr>
+                        <a:t>적용 </a:t>
+                      </a:r>
+                      <a:r>
+                        <a:rPr lang="en-US" altLang="ko-KR" sz="1000" b="0" i="0" kern="1200" baseline="0" smtClean="0">
+                          <a:solidFill>
+                            <a:srgbClr val="0000FF"/>
+                          </a:solidFill>
+                          <a:effectLst/>
+                          <a:latin typeface="+mn-lt"/>
+                          <a:ea typeface="+mn-ea"/>
+                          <a:cs typeface="+mn-cs"/>
+                        </a:rPr>
+                        <a:t>SW Version : V01.13.01 (MVa </a:t>
+                      </a:r>
+                      <a:r>
+                        <a:rPr lang="ko-KR" altLang="en-US" sz="1000" b="0" i="0" kern="1200" baseline="0" smtClean="0">
+                          <a:solidFill>
+                            <a:srgbClr val="0000FF"/>
+                          </a:solidFill>
+                          <a:effectLst/>
+                          <a:latin typeface="+mn-lt"/>
+                          <a:ea typeface="+mn-ea"/>
+                          <a:cs typeface="+mn-cs"/>
+                        </a:rPr>
+                        <a:t>차종</a:t>
+                      </a:r>
+                      <a:r>
+                        <a:rPr lang="en-US" altLang="ko-KR" sz="1000" b="0" i="0" kern="1200" baseline="0" smtClean="0">
+                          <a:solidFill>
+                            <a:srgbClr val="0000FF"/>
+                          </a:solidFill>
+                          <a:effectLst/>
+                          <a:latin typeface="+mn-lt"/>
+                          <a:ea typeface="+mn-ea"/>
+                          <a:cs typeface="+mn-cs"/>
+                        </a:rPr>
+                        <a:t>)</a:t>
+                      </a:r>
+                      <a:endParaRPr lang="ko-KR" altLang="en-US" sz="1000" b="0" i="0" kern="1200" smtClean="0">
                         <a:solidFill>
                           <a:srgbClr val="0000FF"/>
                         </a:solidFill>
@@ -24062,7 +23760,7 @@
                         <a:tabLst/>
                         <a:defRPr/>
                       </a:pPr>
-                      <a:endParaRPr kumimoji="1" lang="en-US" altLang="ko-KR" sz="1000" b="1" i="0" u="none" strike="noStrike" kern="1200" cap="none" normalizeH="0" baseline="0" smtClean="0">
+                      <a:endParaRPr kumimoji="1" lang="en-US" altLang="ko-KR" sz="1000" b="0" i="0" u="none" strike="noStrike" kern="1200" cap="none" normalizeH="0" baseline="0" smtClean="0">
                         <a:ln>
                           <a:noFill/>
                         </a:ln>
@@ -24096,7 +23794,229 @@
                         <a:defRPr/>
                       </a:pPr>
                       <a:r>
-                        <a:rPr kumimoji="1" lang="en-US" altLang="ko-KR" sz="1000" b="1" i="0" u="none" strike="noStrike" kern="1200" cap="none" normalizeH="0" baseline="0" smtClean="0">
+                        <a:rPr kumimoji="1" lang="en-US" altLang="ko-KR" sz="1000" b="0" i="0" u="none" strike="noStrike" kern="1200" cap="none" normalizeH="0" baseline="0" smtClean="0">
+                          <a:ln>
+                            <a:noFill/>
+                          </a:ln>
+                          <a:solidFill>
+                            <a:srgbClr val="0000FF"/>
+                          </a:solidFill>
+                          <a:effectLst/>
+                          <a:latin typeface="+mn-lt"/>
+                          <a:ea typeface="+mn-ea"/>
+                          <a:cs typeface="+mn-cs"/>
+                        </a:rPr>
+                        <a:t>2. R</a:t>
+                      </a:r>
+                      <a:r>
+                        <a:rPr kumimoji="1" lang="ko-KR" altLang="en-US" sz="1000" b="0" i="0" u="none" strike="noStrike" kern="1200" cap="none" normalizeH="0" baseline="0" smtClean="0">
+                          <a:ln>
+                            <a:noFill/>
+                          </a:ln>
+                          <a:solidFill>
+                            <a:srgbClr val="0000FF"/>
+                          </a:solidFill>
+                          <a:effectLst/>
+                          <a:latin typeface="+mn-lt"/>
+                          <a:ea typeface="+mn-ea"/>
+                          <a:cs typeface="+mn-cs"/>
+                        </a:rPr>
+                        <a:t>로직 튜닝에 따른 </a:t>
+                      </a:r>
+                      <a:r>
+                        <a:rPr kumimoji="1" lang="en-US" altLang="ko-KR" sz="1000" b="0" i="0" u="none" strike="noStrike" kern="1200" cap="none" normalizeH="0" baseline="0" smtClean="0">
+                          <a:ln>
+                            <a:noFill/>
+                          </a:ln>
+                          <a:solidFill>
+                            <a:srgbClr val="0000FF"/>
+                          </a:solidFill>
+                          <a:effectLst/>
+                          <a:latin typeface="+mn-lt"/>
+                          <a:ea typeface="+mn-ea"/>
+                          <a:cs typeface="+mn-cs"/>
+                        </a:rPr>
+                        <a:t>HVAC </a:t>
+                      </a:r>
+                      <a:r>
+                        <a:rPr kumimoji="1" lang="ko-KR" altLang="en-US" sz="1000" b="0" i="0" u="none" strike="noStrike" kern="1200" cap="none" normalizeH="0" baseline="0" smtClean="0">
+                          <a:ln>
+                            <a:noFill/>
+                          </a:ln>
+                          <a:solidFill>
+                            <a:srgbClr val="0000FF"/>
+                          </a:solidFill>
+                          <a:effectLst/>
+                          <a:latin typeface="+mn-lt"/>
+                          <a:ea typeface="+mn-ea"/>
+                          <a:cs typeface="+mn-cs"/>
+                        </a:rPr>
+                        <a:t>요청 </a:t>
+                      </a:r>
+                      <a:r>
+                        <a:rPr kumimoji="1" lang="en-US" altLang="ko-KR" sz="1000" b="0" i="0" u="none" strike="noStrike" kern="1200" cap="none" normalizeH="0" baseline="0" smtClean="0">
+                          <a:ln>
+                            <a:noFill/>
+                          </a:ln>
+                          <a:solidFill>
+                            <a:srgbClr val="0000FF"/>
+                          </a:solidFill>
+                          <a:effectLst/>
+                          <a:latin typeface="+mn-lt"/>
+                          <a:ea typeface="+mn-ea"/>
+                          <a:cs typeface="+mn-cs"/>
+                        </a:rPr>
+                        <a:t>(To </a:t>
+                      </a:r>
+                      <a:r>
+                        <a:rPr kumimoji="1" lang="ko-KR" altLang="en-US" sz="1000" b="0" i="0" u="none" strike="noStrike" kern="1200" cap="none" normalizeH="0" baseline="0" smtClean="0">
+                          <a:ln>
+                            <a:noFill/>
+                          </a:ln>
+                          <a:solidFill>
+                            <a:srgbClr val="0000FF"/>
+                          </a:solidFill>
+                          <a:effectLst/>
+                          <a:latin typeface="+mn-lt"/>
+                          <a:ea typeface="+mn-ea"/>
+                          <a:cs typeface="+mn-cs"/>
+                        </a:rPr>
+                        <a:t>기구팀</a:t>
+                      </a:r>
+                      <a:r>
+                        <a:rPr kumimoji="1" lang="en-US" altLang="ko-KR" sz="1000" b="0" i="0" u="none" strike="noStrike" kern="1200" cap="none" normalizeH="0" baseline="0" smtClean="0">
+                          <a:ln>
+                            <a:noFill/>
+                          </a:ln>
+                          <a:solidFill>
+                            <a:srgbClr val="0000FF"/>
+                          </a:solidFill>
+                          <a:effectLst/>
+                          <a:latin typeface="+mn-lt"/>
+                          <a:ea typeface="+mn-ea"/>
+                          <a:cs typeface="+mn-cs"/>
+                        </a:rPr>
+                        <a:t>)</a:t>
+                      </a:r>
+                    </a:p>
+                    <a:p>
+                      <a:pPr marL="0" marR="0" lvl="0" indent="0" algn="l" defTabSz="914400" rtl="0" eaLnBrk="1" fontAlgn="base" latinLnBrk="1" hangingPunct="1">
+                        <a:lnSpc>
+                          <a:spcPct val="100000"/>
+                        </a:lnSpc>
+                        <a:spcBef>
+                          <a:spcPct val="20000"/>
+                        </a:spcBef>
+                        <a:spcAft>
+                          <a:spcPct val="0"/>
+                        </a:spcAft>
+                        <a:buClr>
+                          <a:srgbClr val="FF0000"/>
+                        </a:buClr>
+                        <a:buSzTx/>
+                        <a:buFont typeface="Wingdings" pitchFamily="2" charset="2"/>
+                        <a:buNone/>
+                        <a:tabLst/>
+                        <a:defRPr/>
+                      </a:pPr>
+                      <a:r>
+                        <a:rPr kumimoji="1" lang="en-US" altLang="ko-KR" sz="1000" b="0" i="0" u="none" strike="noStrike" kern="1200" cap="none" normalizeH="0" baseline="0" smtClean="0">
+                          <a:ln>
+                            <a:noFill/>
+                          </a:ln>
+                          <a:solidFill>
+                            <a:srgbClr val="0000FF"/>
+                          </a:solidFill>
+                          <a:effectLst/>
+                          <a:latin typeface="+mn-lt"/>
+                          <a:ea typeface="+mn-ea"/>
+                          <a:cs typeface="+mn-cs"/>
+                        </a:rPr>
+                        <a:t>      - 8</a:t>
+                      </a:r>
+                      <a:r>
+                        <a:rPr kumimoji="1" lang="ko-KR" altLang="en-US" sz="1000" b="0" i="0" u="none" strike="noStrike" kern="1200" cap="none" normalizeH="0" baseline="0" smtClean="0">
+                          <a:ln>
+                            <a:noFill/>
+                          </a:ln>
+                          <a:solidFill>
+                            <a:srgbClr val="0000FF"/>
+                          </a:solidFill>
+                          <a:effectLst/>
+                          <a:latin typeface="+mn-lt"/>
+                          <a:ea typeface="+mn-ea"/>
+                          <a:cs typeface="+mn-cs"/>
+                        </a:rPr>
+                        <a:t>월 중순 입고 예정</a:t>
+                      </a:r>
+                      <a:endParaRPr kumimoji="1" lang="en-US" altLang="ko-KR" sz="1000" b="0" i="0" u="none" strike="noStrike" kern="1200" cap="none" normalizeH="0" baseline="0" smtClean="0">
+                        <a:ln>
+                          <a:noFill/>
+                        </a:ln>
+                        <a:solidFill>
+                          <a:srgbClr val="0000FF"/>
+                        </a:solidFill>
+                        <a:effectLst/>
+                        <a:latin typeface="+mn-lt"/>
+                        <a:ea typeface="+mn-ea"/>
+                        <a:cs typeface="+mn-cs"/>
+                      </a:endParaRPr>
+                    </a:p>
+                    <a:p>
+                      <a:pPr marL="0" marR="0" lvl="0" indent="0" algn="l" defTabSz="914400" rtl="0" eaLnBrk="1" fontAlgn="base" latinLnBrk="1" hangingPunct="1">
+                        <a:lnSpc>
+                          <a:spcPct val="100000"/>
+                        </a:lnSpc>
+                        <a:spcBef>
+                          <a:spcPct val="20000"/>
+                        </a:spcBef>
+                        <a:spcAft>
+                          <a:spcPct val="0"/>
+                        </a:spcAft>
+                        <a:buClr>
+                          <a:srgbClr val="FF0000"/>
+                        </a:buClr>
+                        <a:buSzTx/>
+                        <a:buFont typeface="Wingdings" pitchFamily="2" charset="2"/>
+                        <a:buNone/>
+                        <a:tabLst/>
+                        <a:defRPr/>
+                      </a:pPr>
+                      <a:endParaRPr kumimoji="1" lang="en-US" altLang="ko-KR" sz="1000" b="0" i="0" u="none" strike="noStrike" kern="1200" cap="none" normalizeH="0" baseline="0" smtClean="0">
+                        <a:ln>
+                          <a:noFill/>
+                        </a:ln>
+                        <a:solidFill>
+                          <a:srgbClr val="0000FF"/>
+                        </a:solidFill>
+                        <a:effectLst/>
+                        <a:latin typeface="+mn-lt"/>
+                        <a:ea typeface="+mn-ea"/>
+                        <a:cs typeface="+mn-cs"/>
+                      </a:endParaRPr>
+                    </a:p>
+                    <a:p>
+                      <a:pPr marL="0" marR="0" lvl="0" indent="0" algn="l" defTabSz="914400" rtl="0" eaLnBrk="1" fontAlgn="base" latinLnBrk="1" hangingPunct="1">
+                        <a:lnSpc>
+                          <a:spcPct val="100000"/>
+                        </a:lnSpc>
+                        <a:spcBef>
+                          <a:spcPct val="20000"/>
+                        </a:spcBef>
+                        <a:spcAft>
+                          <a:spcPct val="0"/>
+                        </a:spcAft>
+                        <a:buClr>
+                          <a:srgbClr val="FF0000"/>
+                        </a:buClr>
+                        <a:buSzTx/>
+                        <a:buFont typeface="Wingdings" pitchFamily="2" charset="2"/>
+                        <a:buNone/>
+                        <a:tabLst/>
+                        <a:defRPr/>
+                      </a:pPr>
+                      <a:r>
+                        <a:rPr kumimoji="1" lang="en-US" altLang="ko-KR" sz="1000" b="0" i="0" u="none" strike="noStrike" kern="1200" cap="none" normalizeH="0" baseline="0" smtClean="0">
                           <a:ln>
                             <a:noFill/>
                           </a:ln>
@@ -24131,7 +24051,7 @@
                         <a:tabLst/>
                         <a:defRPr/>
                       </a:pPr>
-                      <a:endParaRPr kumimoji="1" lang="en-US" altLang="ko-KR" sz="1000" b="1" i="0" u="none" strike="noStrike" kern="1200" cap="none" normalizeH="0" baseline="0" smtClean="0">
+                      <a:endParaRPr kumimoji="1" lang="en-US" altLang="ko-KR" sz="1000" b="0" i="0" u="none" strike="noStrike" kern="1200" cap="none" normalizeH="0" baseline="0" smtClean="0">
                         <a:ln>
                           <a:noFill/>
                         </a:ln>
@@ -24164,7 +24084,7 @@
                         <a:tabLst/>
                         <a:defRPr/>
                       </a:pPr>
-                      <a:endParaRPr kumimoji="1" lang="en-US" altLang="ko-KR" sz="1000" b="1" i="0" u="none" strike="noStrike" kern="1200" cap="none" normalizeH="0" baseline="0" dirty="0">
+                      <a:endParaRPr kumimoji="1" lang="en-US" altLang="ko-KR" sz="1000" b="0" i="0" u="none" strike="noStrike" kern="1200" cap="none" normalizeH="0" baseline="0" dirty="0">
                         <a:ln>
                           <a:noFill/>
                         </a:ln>
@@ -24249,12 +24169,12 @@
                         <a:defRPr/>
                       </a:pPr>
                       <a:r>
-                        <a:rPr kumimoji="1" lang="en-US" altLang="ko-KR" sz="1000" b="1" i="0" u="none" strike="noStrike" kern="1200" cap="none" normalizeH="0" baseline="0" smtClean="0">
+                        <a:rPr kumimoji="1" lang="en-US" altLang="ko-KR" sz="1000" b="0" i="0" u="none" strike="noStrike" kern="1200" cap="none" normalizeH="0" baseline="0" smtClean="0">
                           <a:ln>
                             <a:noFill/>
                           </a:ln>
                           <a:solidFill>
-                            <a:srgbClr val="0000FF"/>
+                            <a:schemeClr val="tx1"/>
                           </a:solidFill>
                           <a:effectLst/>
                           <a:latin typeface="+mn-lt"/>
@@ -24264,12 +24184,12 @@
                         <a:t>1. Proto </a:t>
                       </a:r>
                       <a:r>
-                        <a:rPr kumimoji="1" lang="ko-KR" altLang="en-US" sz="1000" b="1" i="0" u="none" strike="noStrike" kern="1200" cap="none" normalizeH="0" baseline="0" smtClean="0">
+                        <a:rPr kumimoji="1" lang="ko-KR" altLang="en-US" sz="1000" b="0" i="0" u="none" strike="noStrike" kern="1200" cap="none" normalizeH="0" baseline="0" smtClean="0">
                           <a:ln>
                             <a:noFill/>
                           </a:ln>
                           <a:solidFill>
-                            <a:srgbClr val="0000FF"/>
+                            <a:schemeClr val="tx1"/>
                           </a:solidFill>
                           <a:effectLst/>
                           <a:latin typeface="+mn-lt"/>
@@ -24278,12 +24198,12 @@
                         </a:rPr>
                         <a:t>납품 준비 </a:t>
                       </a:r>
-                      <a:endParaRPr kumimoji="1" lang="en-US" altLang="ko-KR" sz="1000" b="1" i="0" u="none" strike="noStrike" kern="1200" cap="none" normalizeH="0" baseline="0" smtClean="0">
+                      <a:endParaRPr kumimoji="1" lang="en-US" altLang="ko-KR" sz="1000" b="0" i="0" u="none" strike="noStrike" kern="1200" cap="none" normalizeH="0" baseline="0" smtClean="0">
                         <a:ln>
                           <a:noFill/>
                         </a:ln>
                         <a:solidFill>
-                          <a:srgbClr val="0000FF"/>
+                          <a:schemeClr val="tx1"/>
                         </a:solidFill>
                         <a:effectLst/>
                         <a:latin typeface="+mn-lt"/>
@@ -24312,12 +24232,12 @@
                         <a:defRPr/>
                       </a:pPr>
                       <a:r>
-                        <a:rPr kumimoji="1" lang="en-US" altLang="ko-KR" sz="1000" b="1" i="0" u="none" strike="noStrike" kern="1200" cap="none" normalizeH="0" baseline="0" smtClean="0">
+                        <a:rPr kumimoji="1" lang="en-US" altLang="ko-KR" sz="1000" b="0" i="0" u="none" strike="noStrike" kern="1200" cap="none" normalizeH="0" baseline="0" smtClean="0">
                           <a:ln>
                             <a:noFill/>
                           </a:ln>
                           <a:solidFill>
-                            <a:srgbClr val="0000FF"/>
+                            <a:schemeClr val="tx1"/>
                           </a:solidFill>
                           <a:effectLst/>
                           <a:latin typeface="+mn-lt"/>
@@ -24327,12 +24247,12 @@
                         <a:t>     - </a:t>
                       </a:r>
                       <a:r>
-                        <a:rPr kumimoji="1" lang="ko-KR" altLang="en-US" sz="1000" b="1" i="0" u="none" strike="noStrike" kern="1200" cap="none" normalizeH="0" baseline="0" smtClean="0">
+                        <a:rPr kumimoji="1" lang="ko-KR" altLang="en-US" sz="1000" b="0" i="0" u="none" strike="noStrike" kern="1200" cap="none" normalizeH="0" baseline="0" smtClean="0">
                           <a:ln>
                             <a:noFill/>
                           </a:ln>
                           <a:solidFill>
-                            <a:srgbClr val="0000FF"/>
+                            <a:schemeClr val="tx1"/>
                           </a:solidFill>
                           <a:effectLst/>
                           <a:latin typeface="+mn-lt"/>
@@ -24342,12 +24262,12 @@
                         <a:t>한온 샘플 입고일 </a:t>
                       </a:r>
                       <a:r>
-                        <a:rPr kumimoji="1" lang="en-US" altLang="ko-KR" sz="1000" b="1" i="0" u="none" strike="noStrike" kern="1200" cap="none" normalizeH="0" baseline="0" smtClean="0">
+                        <a:rPr kumimoji="1" lang="en-US" altLang="ko-KR" sz="1000" b="0" i="0" u="none" strike="noStrike" kern="1200" cap="none" normalizeH="0" baseline="0" smtClean="0">
                           <a:ln>
                             <a:noFill/>
                           </a:ln>
                           <a:solidFill>
-                            <a:srgbClr val="0000FF"/>
+                            <a:schemeClr val="tx1"/>
                           </a:solidFill>
                           <a:effectLst/>
                           <a:latin typeface="+mn-lt"/>
@@ -24378,12 +24298,12 @@
                         <a:defRPr/>
                       </a:pPr>
                       <a:r>
-                        <a:rPr kumimoji="1" lang="en-US" altLang="ko-KR" sz="1000" b="1" i="0" u="none" strike="noStrike" kern="1200" cap="none" normalizeH="0" baseline="0" smtClean="0">
+                        <a:rPr kumimoji="1" lang="en-US" altLang="ko-KR" sz="1000" b="0" i="0" u="none" strike="noStrike" kern="1200" cap="none" normalizeH="0" baseline="0" smtClean="0">
                           <a:ln>
                             <a:noFill/>
                           </a:ln>
                           <a:solidFill>
-                            <a:srgbClr val="0000FF"/>
+                            <a:schemeClr val="tx1"/>
                           </a:solidFill>
                           <a:effectLst/>
                           <a:latin typeface="+mn-lt"/>
@@ -24393,12 +24313,12 @@
                         <a:t>     - </a:t>
                       </a:r>
                       <a:r>
-                        <a:rPr kumimoji="1" lang="ko-KR" altLang="en-US" sz="1000" b="1" i="0" u="none" strike="noStrike" kern="1200" cap="none" normalizeH="0" baseline="0" smtClean="0">
+                        <a:rPr kumimoji="1" lang="ko-KR" altLang="en-US" sz="1000" b="0" i="0" u="none" strike="noStrike" kern="1200" cap="none" normalizeH="0" baseline="0" smtClean="0">
                           <a:ln>
                             <a:noFill/>
                           </a:ln>
                           <a:solidFill>
-                            <a:srgbClr val="0000FF"/>
+                            <a:schemeClr val="tx1"/>
                           </a:solidFill>
                           <a:effectLst/>
                           <a:latin typeface="+mn-lt"/>
@@ -24408,12 +24328,12 @@
                         <a:t>로직 점검 진행 </a:t>
                       </a:r>
                       <a:r>
-                        <a:rPr kumimoji="1" lang="en-US" altLang="ko-KR" sz="1000" b="1" i="0" u="none" strike="noStrike" kern="1200" cap="none" normalizeH="0" baseline="0" smtClean="0">
+                        <a:rPr kumimoji="1" lang="en-US" altLang="ko-KR" sz="1000" b="0" i="0" u="none" strike="noStrike" kern="1200" cap="none" normalizeH="0" baseline="0" smtClean="0">
                           <a:ln>
                             <a:noFill/>
                           </a:ln>
                           <a:solidFill>
-                            <a:srgbClr val="0000FF"/>
+                            <a:schemeClr val="tx1"/>
                           </a:solidFill>
                           <a:effectLst/>
                           <a:latin typeface="+mn-lt"/>
@@ -24444,12 +24364,12 @@
                         <a:defRPr/>
                       </a:pPr>
                       <a:r>
-                        <a:rPr kumimoji="1" lang="en-US" altLang="ko-KR" sz="1000" b="1" i="0" u="none" strike="noStrike" kern="1200" cap="none" normalizeH="0" baseline="0" smtClean="0">
+                        <a:rPr kumimoji="1" lang="en-US" altLang="ko-KR" sz="1000" b="0" i="0" u="none" strike="noStrike" kern="1200" cap="none" normalizeH="0" baseline="0" smtClean="0">
                           <a:ln>
                             <a:noFill/>
                           </a:ln>
                           <a:solidFill>
-                            <a:srgbClr val="0000FF"/>
+                            <a:schemeClr val="tx1"/>
                           </a:solidFill>
                           <a:effectLst/>
                           <a:latin typeface="+mn-lt"/>
@@ -24459,12 +24379,12 @@
                         <a:t>        : </a:t>
                       </a:r>
                       <a:r>
-                        <a:rPr kumimoji="1" lang="ko-KR" altLang="en-US" sz="1000" b="1" i="0" u="none" strike="noStrike" kern="1200" cap="none" normalizeH="0" baseline="0" smtClean="0">
+                        <a:rPr kumimoji="1" lang="ko-KR" altLang="en-US" sz="1000" b="0" i="0" u="none" strike="noStrike" kern="1200" cap="none" normalizeH="0" baseline="0" smtClean="0">
                           <a:ln>
                             <a:noFill/>
                           </a:ln>
                           <a:solidFill>
-                            <a:srgbClr val="0000FF"/>
+                            <a:schemeClr val="tx1"/>
                           </a:solidFill>
                           <a:effectLst/>
                           <a:latin typeface="+mn-lt"/>
@@ -24473,12 +24393,12 @@
                         </a:rPr>
                         <a:t>로직 점검 체크리스트에 따른 평가</a:t>
                       </a:r>
-                      <a:endParaRPr kumimoji="1" lang="en-US" altLang="ko-KR" sz="1000" b="1" i="0" u="none" strike="noStrike" kern="1200" cap="none" normalizeH="0" baseline="0" smtClean="0">
+                      <a:endParaRPr kumimoji="1" lang="en-US" altLang="ko-KR" sz="1000" b="0" i="0" u="none" strike="noStrike" kern="1200" cap="none" normalizeH="0" baseline="0" smtClean="0">
                         <a:ln>
                           <a:noFill/>
                         </a:ln>
                         <a:solidFill>
-                          <a:srgbClr val="0000FF"/>
+                          <a:schemeClr val="tx1"/>
                         </a:solidFill>
                         <a:effectLst/>
                         <a:latin typeface="+mn-lt"/>
@@ -24507,12 +24427,12 @@
                         <a:defRPr/>
                       </a:pPr>
                       <a:r>
-                        <a:rPr kumimoji="1" lang="en-US" altLang="ko-KR" sz="1000" b="1" i="0" u="none" strike="noStrike" kern="1200" cap="none" normalizeH="0" baseline="0" smtClean="0">
+                        <a:rPr kumimoji="1" lang="en-US" altLang="ko-KR" sz="1000" b="0" i="0" u="none" strike="noStrike" kern="1200" cap="none" normalizeH="0" baseline="0" smtClean="0">
                           <a:ln>
                             <a:noFill/>
                           </a:ln>
                           <a:solidFill>
-                            <a:srgbClr val="0000FF"/>
+                            <a:schemeClr val="tx1"/>
                           </a:solidFill>
                           <a:effectLst/>
                           <a:latin typeface="+mn-lt"/>
@@ -24522,12 +24442,12 @@
                         <a:t>        : MVa </a:t>
                       </a:r>
                       <a:r>
-                        <a:rPr kumimoji="1" lang="ko-KR" altLang="en-US" sz="1000" b="1" i="0" u="none" strike="noStrike" kern="1200" cap="none" normalizeH="0" baseline="0" smtClean="0">
+                        <a:rPr kumimoji="1" lang="ko-KR" altLang="en-US" sz="1000" b="0" i="0" u="none" strike="noStrike" kern="1200" cap="none" normalizeH="0" baseline="0" smtClean="0">
                           <a:ln>
                             <a:noFill/>
                           </a:ln>
                           <a:solidFill>
-                            <a:srgbClr val="0000FF"/>
+                            <a:schemeClr val="tx1"/>
                           </a:solidFill>
                           <a:effectLst/>
                           <a:latin typeface="+mn-lt"/>
@@ -24537,12 +24457,12 @@
                         <a:t>실차 평가 </a:t>
                       </a:r>
                       <a:r>
-                        <a:rPr kumimoji="1" lang="en-US" altLang="ko-KR" sz="1000" b="1" i="0" u="none" strike="noStrike" kern="1200" cap="none" normalizeH="0" baseline="0" smtClean="0">
+                        <a:rPr kumimoji="1" lang="en-US" altLang="ko-KR" sz="1000" b="0" i="0" u="none" strike="noStrike" kern="1200" cap="none" normalizeH="0" baseline="0" smtClean="0">
                           <a:ln>
                             <a:noFill/>
                           </a:ln>
                           <a:solidFill>
-                            <a:srgbClr val="0000FF"/>
+                            <a:schemeClr val="tx1"/>
                           </a:solidFill>
                           <a:effectLst/>
                           <a:latin typeface="+mn-lt"/>
@@ -24552,12 +24472,12 @@
                         <a:t>Law </a:t>
                       </a:r>
                       <a:r>
-                        <a:rPr kumimoji="1" lang="ko-KR" altLang="en-US" sz="1000" b="1" i="0" u="none" strike="noStrike" kern="1200" cap="none" normalizeH="0" baseline="0" smtClean="0">
+                        <a:rPr kumimoji="1" lang="ko-KR" altLang="en-US" sz="1000" b="0" i="0" u="none" strike="noStrike" kern="1200" cap="none" normalizeH="0" baseline="0" smtClean="0">
                           <a:ln>
                             <a:noFill/>
                           </a:ln>
                           <a:solidFill>
-                            <a:srgbClr val="0000FF"/>
+                            <a:schemeClr val="tx1"/>
                           </a:solidFill>
                           <a:effectLst/>
                           <a:latin typeface="+mn-lt"/>
@@ -24566,12 +24486,12 @@
                         </a:rPr>
                         <a:t>데이터를 활용한 시뮬레이션 평가</a:t>
                       </a:r>
-                      <a:endParaRPr kumimoji="1" lang="en-US" altLang="ko-KR" sz="1000" b="1" i="0" u="none" strike="noStrike" kern="1200" cap="none" normalizeH="0" baseline="0" smtClean="0">
+                      <a:endParaRPr kumimoji="1" lang="en-US" altLang="ko-KR" sz="1000" b="0" i="0" u="none" strike="noStrike" kern="1200" cap="none" normalizeH="0" baseline="0" smtClean="0">
                         <a:ln>
                           <a:noFill/>
                         </a:ln>
                         <a:solidFill>
-                          <a:srgbClr val="0000FF"/>
+                          <a:schemeClr val="tx1"/>
                         </a:solidFill>
                         <a:effectLst/>
                         <a:latin typeface="+mn-lt"/>
@@ -24600,12 +24520,12 @@
                         <a:defRPr/>
                       </a:pPr>
                       <a:r>
-                        <a:rPr kumimoji="1" lang="en-US" altLang="ko-KR" sz="1000" b="1" i="0" u="none" strike="noStrike" kern="1200" cap="none" normalizeH="0" baseline="0" smtClean="0">
+                        <a:rPr kumimoji="1" lang="en-US" altLang="ko-KR" sz="1000" b="0" i="0" u="none" strike="noStrike" kern="1200" cap="none" normalizeH="0" baseline="0" smtClean="0">
                           <a:ln>
                             <a:noFill/>
                           </a:ln>
                           <a:solidFill>
-                            <a:srgbClr val="0000FF"/>
+                            <a:schemeClr val="tx1"/>
                           </a:solidFill>
                           <a:effectLst/>
                           <a:latin typeface="+mn-lt"/>
@@ -24615,12 +24535,12 @@
                         <a:t>        : </a:t>
                       </a:r>
                       <a:r>
-                        <a:rPr kumimoji="1" lang="ko-KR" altLang="en-US" sz="1000" b="1" i="0" u="none" strike="noStrike" kern="1200" cap="none" normalizeH="0" baseline="0" smtClean="0">
+                        <a:rPr kumimoji="1" lang="ko-KR" altLang="en-US" sz="1000" b="0" i="0" u="none" strike="noStrike" kern="1200" cap="none" normalizeH="0" baseline="0" smtClean="0">
                           <a:ln>
                             <a:noFill/>
                           </a:ln>
                           <a:solidFill>
-                            <a:srgbClr val="0000FF"/>
+                            <a:schemeClr val="tx1"/>
                           </a:solidFill>
                           <a:effectLst/>
                           <a:latin typeface="+mn-lt"/>
@@ -24630,12 +24550,12 @@
                         <a:t>영하 </a:t>
                       </a:r>
                       <a:r>
-                        <a:rPr kumimoji="1" lang="en-US" altLang="ko-KR" sz="1000" b="1" i="0" u="none" strike="noStrike" kern="1200" cap="none" normalizeH="0" baseline="0" smtClean="0">
+                        <a:rPr kumimoji="1" lang="en-US" altLang="ko-KR" sz="1000" b="0" i="0" u="none" strike="noStrike" kern="1200" cap="none" normalizeH="0" baseline="0" smtClean="0">
                           <a:ln>
                             <a:noFill/>
                           </a:ln>
                           <a:solidFill>
-                            <a:srgbClr val="0000FF"/>
+                            <a:schemeClr val="tx1"/>
                           </a:solidFill>
                           <a:effectLst/>
                           <a:latin typeface="+mn-lt"/>
@@ -24645,12 +24565,12 @@
                         <a:t>40</a:t>
                       </a:r>
                       <a:r>
-                        <a:rPr kumimoji="1" lang="ko-KR" altLang="en-US" sz="1000" b="1" i="0" u="none" strike="noStrike" kern="1200" cap="none" normalizeH="0" baseline="0" smtClean="0">
+                        <a:rPr kumimoji="1" lang="ko-KR" altLang="en-US" sz="1000" b="0" i="0" u="none" strike="noStrike" kern="1200" cap="none" normalizeH="0" baseline="0" smtClean="0">
                           <a:ln>
                             <a:noFill/>
                           </a:ln>
                           <a:solidFill>
-                            <a:srgbClr val="0000FF"/>
+                            <a:schemeClr val="tx1"/>
                           </a:solidFill>
                           <a:effectLst/>
                           <a:latin typeface="+mn-lt"/>
@@ -24660,12 +24580,12 @@
                         <a:t>℃ 조건에서 </a:t>
                       </a:r>
                       <a:r>
-                        <a:rPr kumimoji="1" lang="en-US" altLang="ko-KR" sz="1000" b="1" i="0" u="none" strike="noStrike" kern="1200" cap="none" normalizeH="0" baseline="0" smtClean="0">
+                        <a:rPr kumimoji="1" lang="en-US" altLang="ko-KR" sz="1000" b="0" i="0" u="none" strike="noStrike" kern="1200" cap="none" normalizeH="0" baseline="0" smtClean="0">
                           <a:ln>
                             <a:noFill/>
                           </a:ln>
                           <a:solidFill>
-                            <a:srgbClr val="0000FF"/>
+                            <a:schemeClr val="tx1"/>
                           </a:solidFill>
                           <a:effectLst/>
                           <a:latin typeface="+mn-lt"/>
@@ -24675,12 +24595,12 @@
                         <a:t>R </a:t>
                       </a:r>
                       <a:r>
-                        <a:rPr kumimoji="1" lang="ko-KR" altLang="en-US" sz="1000" b="1" i="0" u="none" strike="noStrike" kern="1200" cap="none" normalizeH="0" baseline="0" smtClean="0">
+                        <a:rPr kumimoji="1" lang="ko-KR" altLang="en-US" sz="1000" b="0" i="0" u="none" strike="noStrike" kern="1200" cap="none" normalizeH="0" baseline="0" smtClean="0">
                           <a:ln>
                             <a:noFill/>
                           </a:ln>
                           <a:solidFill>
-                            <a:srgbClr val="0000FF"/>
+                            <a:schemeClr val="tx1"/>
                           </a:solidFill>
                           <a:effectLst/>
                           <a:latin typeface="+mn-lt"/>
@@ -24689,12 +24609,12 @@
                         </a:rPr>
                         <a:t>로직 검증</a:t>
                       </a:r>
-                      <a:endParaRPr kumimoji="1" lang="en-US" altLang="ko-KR" sz="1000" b="1" i="0" u="none" strike="noStrike" kern="1200" cap="none" normalizeH="0" baseline="0" smtClean="0">
+                      <a:endParaRPr kumimoji="1" lang="en-US" altLang="ko-KR" sz="1000" b="0" i="0" u="none" strike="noStrike" kern="1200" cap="none" normalizeH="0" baseline="0" smtClean="0">
                         <a:ln>
                           <a:noFill/>
                         </a:ln>
                         <a:solidFill>
-                          <a:srgbClr val="0000FF"/>
+                          <a:schemeClr val="tx1"/>
                         </a:solidFill>
                         <a:effectLst/>
                         <a:latin typeface="+mn-lt"/>
@@ -24722,7 +24642,7 @@
                         <a:tabLst/>
                         <a:defRPr/>
                       </a:pPr>
-                      <a:endParaRPr kumimoji="1" lang="en-US" altLang="ko-KR" sz="1000" b="1" i="0" u="none" strike="noStrike" kern="1200" cap="none" normalizeH="0" baseline="0" smtClean="0">
+                      <a:endParaRPr kumimoji="1" lang="en-US" altLang="ko-KR" sz="1000" b="0" i="0" u="none" strike="noStrike" kern="1200" cap="none" normalizeH="0" baseline="0" smtClean="0">
                         <a:ln>
                           <a:noFill/>
                         </a:ln>
@@ -27113,7 +27033,7 @@
           <p:nvPr>
             <p:extLst>
               <p:ext uri="{D42A27DB-BD31-4B8C-83A1-F6EECF244321}">
-                <p14:modId xmlns:p14="http://schemas.microsoft.com/office/powerpoint/2010/main" val="1401528805"/>
+                <p14:modId xmlns:p14="http://schemas.microsoft.com/office/powerpoint/2010/main" val="2335967813"/>
               </p:ext>
             </p:extLst>
           </p:nvPr>
@@ -27793,7 +27713,7 @@
                     <a:p>
                       <a:pPr latinLnBrk="0"/>
                       <a:r>
-                        <a:rPr lang="en-US" altLang="ko-KR" sz="1000" b="1" i="0" kern="1200" smtClean="0">
+                        <a:rPr lang="en-US" altLang="ko-KR" sz="1000" b="0" i="0" kern="1200" smtClean="0">
                           <a:solidFill>
                             <a:srgbClr val="0000FF"/>
                           </a:solidFill>
@@ -27805,7 +27725,7 @@
                         <a:t>1. Proto</a:t>
                       </a:r>
                       <a:r>
-                        <a:rPr lang="en-US" altLang="ko-KR" sz="1000" b="1" i="0" kern="1200" baseline="0" smtClean="0">
+                        <a:rPr lang="en-US" altLang="ko-KR" sz="1000" b="0" i="0" kern="1200" baseline="0" smtClean="0">
                           <a:solidFill>
                             <a:srgbClr val="0000FF"/>
                           </a:solidFill>
@@ -27817,7 +27737,7 @@
                         <a:t> </a:t>
                       </a:r>
                       <a:r>
-                        <a:rPr lang="ko-KR" altLang="en-US" sz="1000" b="1" i="0" kern="1200" baseline="0" smtClean="0">
+                        <a:rPr lang="ko-KR" altLang="en-US" sz="1000" b="0" i="0" kern="1200" baseline="0" smtClean="0">
                           <a:solidFill>
                             <a:srgbClr val="0000FF"/>
                           </a:solidFill>
@@ -27829,7 +27749,7 @@
                         <a:t>납품</a:t>
                       </a:r>
                       <a:r>
-                        <a:rPr lang="ko-KR" altLang="en-US" sz="1000" b="1" i="0" kern="1200" smtClean="0">
+                        <a:rPr lang="ko-KR" altLang="en-US" sz="1000" b="0" i="0" kern="1200" smtClean="0">
                           <a:solidFill>
                             <a:srgbClr val="0000FF"/>
                           </a:solidFill>
@@ -27840,7 +27760,7 @@
                         </a:rPr>
                         <a:t> </a:t>
                       </a:r>
-                      <a:endParaRPr lang="en-US" altLang="ko-KR" sz="1000" b="1" i="0" kern="1200" smtClean="0">
+                      <a:endParaRPr lang="en-US" altLang="ko-KR" sz="1000" b="0" i="0" kern="1200" smtClean="0">
                         <a:solidFill>
                           <a:srgbClr val="0000FF"/>
                         </a:solidFill>
@@ -27853,7 +27773,7 @@
                     <a:p>
                       <a:pPr latinLnBrk="0"/>
                       <a:r>
-                        <a:rPr lang="en-US" altLang="ko-KR" sz="1000" b="1" i="0" kern="1200" smtClean="0">
+                        <a:rPr lang="en-US" altLang="ko-KR" sz="1000" b="0" i="0" kern="1200" smtClean="0">
                           <a:solidFill>
                             <a:srgbClr val="0000FF"/>
                           </a:solidFill>
@@ -27865,7 +27785,7 @@
                         <a:t> - </a:t>
                       </a:r>
                       <a:r>
-                        <a:rPr lang="ko-KR" altLang="en-US" sz="1000" b="1" i="0" kern="1200" smtClean="0">
+                        <a:rPr lang="ko-KR" altLang="en-US" sz="1000" b="0" i="0" kern="1200" smtClean="0">
                           <a:solidFill>
                             <a:srgbClr val="0000FF"/>
                           </a:solidFill>
@@ -27877,7 +27797,7 @@
                         <a:t>북미법인 생산 및 항공편 국내 입고 </a:t>
                       </a:r>
                       <a:r>
-                        <a:rPr lang="en-US" altLang="ko-KR" sz="1000" b="1" i="0" kern="1200" smtClean="0">
+                        <a:rPr lang="en-US" altLang="ko-KR" sz="1000" b="0" i="0" kern="1200" smtClean="0">
                           <a:solidFill>
                             <a:srgbClr val="0000FF"/>
                           </a:solidFill>
@@ -27901,7 +27821,7 @@
                     <a:p>
                       <a:pPr latinLnBrk="0"/>
                       <a:r>
-                        <a:rPr lang="ko-KR" altLang="en-US" sz="1000" b="1" i="0" kern="1200" smtClean="0">
+                        <a:rPr lang="ko-KR" altLang="en-US" sz="1000" b="0" i="0" kern="1200" smtClean="0">
                           <a:solidFill>
                             <a:srgbClr val="0000FF"/>
                           </a:solidFill>
@@ -27913,7 +27833,7 @@
                         <a:t> </a:t>
                       </a:r>
                       <a:r>
-                        <a:rPr lang="en-US" altLang="ko-KR" sz="1000" b="1" i="0" kern="1200" smtClean="0">
+                        <a:rPr lang="en-US" altLang="ko-KR" sz="1000" b="0" i="0" kern="1200" smtClean="0">
                           <a:solidFill>
                             <a:srgbClr val="0000FF"/>
                           </a:solidFill>
@@ -27925,7 +27845,7 @@
                         <a:t>- </a:t>
                       </a:r>
                       <a:r>
-                        <a:rPr lang="ko-KR" altLang="en-US" sz="1000" b="1" i="0" kern="1200" smtClean="0">
+                        <a:rPr lang="ko-KR" altLang="en-US" sz="1000" b="0" i="0" kern="1200" smtClean="0">
                           <a:solidFill>
                             <a:srgbClr val="0000FF"/>
                           </a:solidFill>
@@ -27937,7 +27857,7 @@
                         <a:t>기능검사 및 외관검사 </a:t>
                       </a:r>
                       <a:r>
-                        <a:rPr lang="en-US" altLang="ko-KR" sz="1000" b="1" i="0" kern="1200" smtClean="0">
+                        <a:rPr lang="en-US" altLang="ko-KR" sz="1000" b="0" i="0" kern="1200" smtClean="0">
                           <a:solidFill>
                             <a:srgbClr val="0000FF"/>
                           </a:solidFill>
@@ -27961,7 +27881,7 @@
                     <a:p>
                       <a:pPr latinLnBrk="0"/>
                       <a:r>
-                        <a:rPr lang="ko-KR" altLang="en-US" sz="1000" b="1" i="0" kern="1200" smtClean="0">
+                        <a:rPr lang="ko-KR" altLang="en-US" sz="1000" b="0" i="0" kern="1200" smtClean="0">
                           <a:solidFill>
                             <a:srgbClr val="0000FF"/>
                           </a:solidFill>
@@ -27973,7 +27893,7 @@
                         <a:t> </a:t>
                       </a:r>
                       <a:r>
-                        <a:rPr lang="en-US" altLang="ko-KR" sz="1000" b="1" i="0" kern="1200" smtClean="0">
+                        <a:rPr lang="en-US" altLang="ko-KR" sz="1000" b="0" i="0" kern="1200" smtClean="0">
                           <a:solidFill>
                             <a:srgbClr val="0000FF"/>
                           </a:solidFill>
@@ -27985,7 +27905,7 @@
                         <a:t>- </a:t>
                       </a:r>
                       <a:r>
-                        <a:rPr lang="ko-KR" altLang="en-US" sz="1000" b="1" i="0" kern="1200" smtClean="0">
+                        <a:rPr lang="ko-KR" altLang="en-US" sz="1000" b="0" i="0" kern="1200" smtClean="0">
                           <a:solidFill>
                             <a:srgbClr val="0000FF"/>
                           </a:solidFill>
@@ -27997,7 +27917,7 @@
                         <a:t>한온 납품 </a:t>
                       </a:r>
                       <a:r>
-                        <a:rPr lang="en-US" altLang="ko-KR" sz="1000" b="1" i="0" kern="1200" smtClean="0">
+                        <a:rPr lang="en-US" altLang="ko-KR" sz="1000" b="0" i="0" kern="1200" smtClean="0">
                           <a:solidFill>
                             <a:srgbClr val="0000FF"/>
                           </a:solidFill>
@@ -28009,7 +27929,7 @@
                         <a:t>: 7/4 (83</a:t>
                       </a:r>
                       <a:r>
-                        <a:rPr lang="ko-KR" altLang="en-US" sz="1000" b="1" i="0" kern="1200" smtClean="0">
+                        <a:rPr lang="ko-KR" altLang="en-US" sz="1000" b="0" i="0" kern="1200" smtClean="0">
                           <a:solidFill>
                             <a:srgbClr val="0000FF"/>
                           </a:solidFill>
@@ -28021,7 +27941,7 @@
                         <a:t>대</a:t>
                       </a:r>
                       <a:r>
-                        <a:rPr lang="en-US" altLang="ko-KR" sz="1000" b="1" i="0" kern="1200" smtClean="0">
+                        <a:rPr lang="en-US" altLang="ko-KR" sz="1000" b="0" i="0" kern="1200" smtClean="0">
                           <a:solidFill>
                             <a:srgbClr val="0000FF"/>
                           </a:solidFill>
@@ -28036,7 +27956,7 @@
                     <a:p>
                       <a:pPr latinLnBrk="0"/>
                       <a:r>
-                        <a:rPr lang="en-US" altLang="ko-KR" sz="1000" b="1" i="0" kern="1200" smtClean="0">
+                        <a:rPr lang="en-US" altLang="ko-KR" sz="1000" b="0" i="0" kern="1200" smtClean="0">
                           <a:solidFill>
                             <a:srgbClr val="0000FF"/>
                           </a:solidFill>
@@ -28048,7 +27968,7 @@
                         <a:t> -</a:t>
                       </a:r>
                       <a:r>
-                        <a:rPr lang="en-US" altLang="ko-KR" sz="1000" b="1" i="0" kern="1200" baseline="0" smtClean="0">
+                        <a:rPr lang="en-US" altLang="ko-KR" sz="1000" b="0" i="0" kern="1200" baseline="0" smtClean="0">
                           <a:solidFill>
                             <a:srgbClr val="0000FF"/>
                           </a:solidFill>
@@ -28060,7 +27980,7 @@
                         <a:t> </a:t>
                       </a:r>
                       <a:r>
-                        <a:rPr lang="ko-KR" altLang="en-US" sz="1000" b="1" i="0" kern="1200" baseline="0" smtClean="0">
+                        <a:rPr lang="ko-KR" altLang="en-US" sz="1000" b="0" i="0" kern="1200" baseline="0" smtClean="0">
                           <a:solidFill>
                             <a:srgbClr val="0000FF"/>
                           </a:solidFill>
@@ -28072,7 +27992,7 @@
                         <a:t>적용 </a:t>
                       </a:r>
                       <a:r>
-                        <a:rPr lang="en-US" altLang="ko-KR" sz="1000" b="1" i="0" kern="1200" baseline="0" smtClean="0">
+                        <a:rPr lang="en-US" altLang="ko-KR" sz="1000" b="0" i="0" kern="1200" baseline="0" smtClean="0">
                           <a:solidFill>
                             <a:srgbClr val="0000FF"/>
                           </a:solidFill>
@@ -28084,7 +28004,7 @@
                         <a:t>SW Version : V01.13.01 (NEa </a:t>
                       </a:r>
                       <a:r>
-                        <a:rPr lang="ko-KR" altLang="en-US" sz="1000" b="1" i="0" kern="1200" baseline="0" smtClean="0">
+                        <a:rPr lang="ko-KR" altLang="en-US" sz="1000" b="0" i="0" kern="1200" baseline="0" smtClean="0">
                           <a:solidFill>
                             <a:srgbClr val="0000FF"/>
                           </a:solidFill>
@@ -28096,7 +28016,7 @@
                         <a:t>차종</a:t>
                       </a:r>
                       <a:r>
-                        <a:rPr lang="en-US" altLang="ko-KR" sz="1000" b="1" i="0" kern="1200" baseline="0" smtClean="0">
+                        <a:rPr lang="en-US" altLang="ko-KR" sz="1000" b="0" i="0" kern="1200" baseline="0" smtClean="0">
                           <a:solidFill>
                             <a:srgbClr val="0000FF"/>
                           </a:solidFill>
@@ -30602,7 +30522,7 @@
           <p:nvPr>
             <p:extLst>
               <p:ext uri="{D42A27DB-BD31-4B8C-83A1-F6EECF244321}">
-                <p14:modId xmlns:p14="http://schemas.microsoft.com/office/powerpoint/2010/main" val="3768029632"/>
+                <p14:modId xmlns:p14="http://schemas.microsoft.com/office/powerpoint/2010/main" val="2675768246"/>
               </p:ext>
             </p:extLst>
           </p:nvPr>
@@ -31300,7 +31220,7 @@
                         <a:defRPr/>
                       </a:pPr>
                       <a:r>
-                        <a:rPr kumimoji="1" lang="en-US" altLang="ko-KR" sz="1000" b="1" i="0" u="none" strike="noStrike" kern="1200" cap="none" normalizeH="0" baseline="0" smtClean="0">
+                        <a:rPr kumimoji="1" lang="en-US" altLang="ko-KR" sz="1000" b="0" i="0" u="none" strike="noStrike" kern="1200" cap="none" normalizeH="0" baseline="0" smtClean="0">
                           <a:ln>
                             <a:noFill/>
                           </a:ln>
@@ -31315,7 +31235,7 @@
                         <a:t>1. R</a:t>
                       </a:r>
                       <a:r>
-                        <a:rPr kumimoji="1" lang="ko-KR" altLang="en-US" sz="1000" b="1" i="0" u="none" strike="noStrike" kern="1200" cap="none" normalizeH="0" baseline="0" smtClean="0">
+                        <a:rPr kumimoji="1" lang="ko-KR" altLang="en-US" sz="1000" b="0" i="0" u="none" strike="noStrike" kern="1200" cap="none" normalizeH="0" baseline="0" smtClean="0">
                           <a:ln>
                             <a:noFill/>
                           </a:ln>
@@ -31330,7 +31250,7 @@
                         <a:t>로직 튜닝에 따른 </a:t>
                       </a:r>
                       <a:r>
-                        <a:rPr kumimoji="1" lang="en-US" altLang="ko-KR" sz="1000" b="1" i="0" u="none" strike="noStrike" kern="1200" cap="none" normalizeH="0" baseline="0" smtClean="0">
+                        <a:rPr kumimoji="1" lang="en-US" altLang="ko-KR" sz="1000" b="0" i="0" u="none" strike="noStrike" kern="1200" cap="none" normalizeH="0" baseline="0" smtClean="0">
                           <a:ln>
                             <a:noFill/>
                           </a:ln>
@@ -31345,7 +31265,7 @@
                         <a:t>HVAC </a:t>
                       </a:r>
                       <a:r>
-                        <a:rPr kumimoji="1" lang="ko-KR" altLang="en-US" sz="1000" b="1" i="0" u="none" strike="noStrike" kern="1200" cap="none" normalizeH="0" baseline="0" smtClean="0">
+                        <a:rPr kumimoji="1" lang="ko-KR" altLang="en-US" sz="1000" b="0" i="0" u="none" strike="noStrike" kern="1200" cap="none" normalizeH="0" baseline="0" smtClean="0">
                           <a:ln>
                             <a:noFill/>
                           </a:ln>
@@ -31360,7 +31280,7 @@
                         <a:t>요청 </a:t>
                       </a:r>
                       <a:r>
-                        <a:rPr kumimoji="1" lang="en-US" altLang="ko-KR" sz="1000" b="1" i="0" u="none" strike="noStrike" kern="1200" cap="none" normalizeH="0" baseline="0" smtClean="0">
+                        <a:rPr kumimoji="1" lang="en-US" altLang="ko-KR" sz="1000" b="0" i="0" u="none" strike="noStrike" kern="1200" cap="none" normalizeH="0" baseline="0" smtClean="0">
                           <a:ln>
                             <a:noFill/>
                           </a:ln>
@@ -31375,7 +31295,7 @@
                         <a:t>(To </a:t>
                       </a:r>
                       <a:r>
-                        <a:rPr kumimoji="1" lang="ko-KR" altLang="en-US" sz="1000" b="1" i="0" u="none" strike="noStrike" kern="1200" cap="none" normalizeH="0" baseline="0" smtClean="0">
+                        <a:rPr kumimoji="1" lang="ko-KR" altLang="en-US" sz="1000" b="0" i="0" u="none" strike="noStrike" kern="1200" cap="none" normalizeH="0" baseline="0" smtClean="0">
                           <a:ln>
                             <a:noFill/>
                           </a:ln>
@@ -31390,7 +31310,7 @@
                         <a:t>기구팀</a:t>
                       </a:r>
                       <a:r>
-                        <a:rPr kumimoji="1" lang="en-US" altLang="ko-KR" sz="1000" b="1" i="0" u="none" strike="noStrike" kern="1200" cap="none" normalizeH="0" baseline="0" smtClean="0">
+                        <a:rPr kumimoji="1" lang="en-US" altLang="ko-KR" sz="1000" b="0" i="0" u="none" strike="noStrike" kern="1200" cap="none" normalizeH="0" baseline="0" smtClean="0">
                           <a:ln>
                             <a:noFill/>
                           </a:ln>
@@ -31426,7 +31346,7 @@
                         <a:defRPr/>
                       </a:pPr>
                       <a:r>
-                        <a:rPr kumimoji="1" lang="en-US" altLang="ko-KR" sz="1000" b="1" i="0" u="none" strike="noStrike" kern="1200" cap="none" normalizeH="0" baseline="0" smtClean="0">
+                        <a:rPr kumimoji="1" lang="en-US" altLang="ko-KR" sz="1000" b="0" i="0" u="none" strike="noStrike" kern="1200" cap="none" normalizeH="0" baseline="0" smtClean="0">
                           <a:ln>
                             <a:noFill/>
                           </a:ln>
@@ -31441,7 +31361,7 @@
                         <a:t>      - 7</a:t>
                       </a:r>
                       <a:r>
-                        <a:rPr kumimoji="1" lang="ko-KR" altLang="en-US" sz="1000" b="1" i="0" u="none" strike="noStrike" kern="1200" cap="none" normalizeH="0" baseline="0" smtClean="0">
+                        <a:rPr kumimoji="1" lang="ko-KR" altLang="en-US" sz="1000" b="0" i="0" u="none" strike="noStrike" kern="1200" cap="none" normalizeH="0" baseline="0" smtClean="0">
                           <a:ln>
                             <a:noFill/>
                           </a:ln>
@@ -31456,7 +31376,7 @@
                         <a:t>월 </a:t>
                       </a:r>
                       <a:r>
-                        <a:rPr kumimoji="1" lang="en-US" altLang="ko-KR" sz="1000" b="1" i="0" u="none" strike="noStrike" kern="1200" cap="none" normalizeH="0" baseline="0" smtClean="0">
+                        <a:rPr kumimoji="1" lang="en-US" altLang="ko-KR" sz="1000" b="0" i="0" u="none" strike="noStrike" kern="1200" cap="none" normalizeH="0" baseline="0" smtClean="0">
                           <a:ln>
                             <a:noFill/>
                           </a:ln>
@@ -31471,7 +31391,7 @@
                         <a:t>15</a:t>
                       </a:r>
                       <a:r>
-                        <a:rPr kumimoji="1" lang="ko-KR" altLang="en-US" sz="1000" b="1" i="0" u="none" strike="noStrike" kern="1200" cap="none" normalizeH="0" baseline="0" smtClean="0">
+                        <a:rPr kumimoji="1" lang="ko-KR" altLang="en-US" sz="1000" b="0" i="0" u="none" strike="noStrike" kern="1200" cap="none" normalizeH="0" baseline="0" smtClean="0">
                           <a:ln>
                             <a:noFill/>
                           </a:ln>
@@ -31485,7 +31405,7 @@
                         </a:rPr>
                         <a:t>일 입고 예정</a:t>
                       </a:r>
-                      <a:endParaRPr kumimoji="1" lang="en-US" altLang="ko-KR" sz="1000" b="1" i="0" u="none" strike="noStrike" kern="1200" cap="none" normalizeH="0" baseline="0" smtClean="0">
+                      <a:endParaRPr kumimoji="1" lang="en-US" altLang="ko-KR" sz="1000" b="0" i="0" u="none" strike="noStrike" kern="1200" cap="none" normalizeH="0" baseline="0" smtClean="0">
                         <a:ln>
                           <a:noFill/>
                         </a:ln>
